--- a/Topic_A/Exam_Practice/AT-A-L06_Speaking_Workshop_Healthy_Eating_and_Lifestyle_Choices.pptx
+++ b/Topic_A/Exam_Practice/AT-A-L06_Speaking_Workshop_Healthy_Eating_and_Lifestyle_Choices.pptx
@@ -523,7 +523,11 @@
           <a:lstStyle/>
           <a:p>
             <a:r>
-              <a:rPr lang="en-US" dirty="0"/>
+              <a:rPr lang="ar-SA" dirty="0">
+                <a:latin typeface="Amiri" pitchFamily="2" charset="-78"/>
+                <a:ea typeface="Amiri" pitchFamily="2" charset="-78"/>
+                <a:cs typeface="Amiri" pitchFamily="2" charset="-78"/>
+              </a:rPr>
               <a:t>WORKSHOP AT A GLANCE — 60 minutes on Teams, mostly in breakout rooms of three.
 0–2 Welcome · 2–6 How Paper 3 works · 6–10 Language bank · 10–13 Breakout routine · 13–33 Role plays A–D in rooms (rotate roles) · 33–37 Role-play models (main room) · 37–50 Topic conversation in rooms · 50–55 Conversation models · 55–58 Feedback + self-check · 58–60 Close.
 Content: teacher-made exam scenarios for Advanced Topic A, Lesson 6 (Healthy Eating and Lifestyle Choices, AT-A-L06), using that lesson’s language (nutrition vocabulary, advice with يَجِبُ / يَنْبَغِي أَنْ, reasons). Every task has Core · Develop · Stretch support and a model answer.
@@ -615,7 +619,11 @@
           <a:lstStyle/>
           <a:p>
             <a:r>
-              <a:rPr lang="en-US" dirty="0"/>
+              <a:rPr lang="ar-SA" dirty="0">
+                <a:latin typeface="Amiri" pitchFamily="2" charset="-78"/>
+                <a:ea typeface="Amiri" pitchFamily="2" charset="-78"/>
+                <a:cs typeface="Amiri" pitchFamily="2" charset="-78"/>
+              </a:rPr>
               <a:t>ROLE PLAY C (Develop) — advising a friend.
 SET-UP IN THE BREAKOUT ROOM: A = examiner (reads the left column ONLY — the questions, in order), B = candidate (sees the task column; Core may use the help column), C = observer (ticks the feedback checklist). 1 minute preparation, about 3 minutes speaking, 1 minute feedback, then rotate.
 Task ! is the unexpected question: in the exam the candidate has not seen it — the examiner should read it without warning.
@@ -707,7 +715,11 @@
           <a:lstStyle/>
           <a:p>
             <a:r>
-              <a:rPr lang="en-US" dirty="0"/>
+              <a:rPr lang="ar-SA" dirty="0">
+                <a:latin typeface="Amiri" pitchFamily="2" charset="-78"/>
+                <a:ea typeface="Amiri" pitchFamily="2" charset="-78"/>
+                <a:cs typeface="Amiri" pitchFamily="2" charset="-78"/>
+              </a:rPr>
               <a:t>ROLE PLAY D (Stretch) — a health campaign interview.
 SET-UP IN THE BREAKOUT ROOM: A = examiner (reads the left column ONLY — the questions, in order), B = candidate (sees the task column; Core may use the help column), C = observer (ticks the feedback checklist). 1 minute preparation, about 3 minutes speaking, 1 minute feedback, then rotate.
 Task ! is the unexpected question: in the exam the candidate has not seen it — the examiner should read it without warning.
@@ -1243,7 +1255,11 @@
           <a:lstStyle/>
           <a:p>
             <a:r>
-              <a:rPr lang="en-US" dirty="0"/>
+              <a:rPr lang="ar-SA" dirty="0">
+                <a:latin typeface="Amiri" pitchFamily="2" charset="-78"/>
+                <a:ea typeface="Amiri" pitchFamily="2" charset="-78"/>
+                <a:cs typeface="Amiri" pitchFamily="2" charset="-78"/>
+              </a:rPr>
               <a:t>TOPIC CONVERSATION — Core. Examiner asks the questions in order and may add “لِمَاذَا؟ / هَلْ يُمْكِنُ أَنْ تَشْرَحَ أَكْثَرَ؟” to push for more. Candidate aims for one full sentence per question.
 </a:t>
             </a:r>
@@ -1332,7 +1348,11 @@
           <a:lstStyle/>
           <a:p>
             <a:r>
-              <a:rPr lang="en-US" dirty="0"/>
+              <a:rPr lang="ar-SA" dirty="0">
+                <a:latin typeface="Amiri" pitchFamily="2" charset="-78"/>
+                <a:ea typeface="Amiri" pitchFamily="2" charset="-78"/>
+                <a:cs typeface="Amiri" pitchFamily="2" charset="-78"/>
+              </a:rPr>
               <a:t>TOPIC CONVERSATION — Develop. Examiner asks the questions in order and may add “لِمَاذَا؟ / هَلْ يُمْكِنُ أَنْ تَشْرَحَ أَكْثَرَ؟” to push for more. Candidate aims for two or three sentences, with a reason or some advice.
 </a:t>
             </a:r>
@@ -1421,7 +1441,11 @@
           <a:lstStyle/>
           <a:p>
             <a:r>
-              <a:rPr lang="en-US" dirty="0"/>
+              <a:rPr lang="ar-SA" dirty="0">
+                <a:latin typeface="Amiri" pitchFamily="2" charset="-78"/>
+                <a:ea typeface="Amiri" pitchFamily="2" charset="-78"/>
+                <a:cs typeface="Amiri" pitchFamily="2" charset="-78"/>
+              </a:rPr>
               <a:t>TOPIC CONVERSATION — Stretch. Examiner asks the questions in order and may add “لِمَاذَا؟ / هَلْ يُمْكِنُ أَنْ تَشْرَحَ أَكْثَرَ؟” to push for more. Candidate aims for a developed answer: opinion, comparison, concession and a conditional.
 </a:t>
             </a:r>
@@ -1510,7 +1534,11 @@
           <a:lstStyle/>
           <a:p>
             <a:r>
-              <a:rPr lang="en-US" dirty="0"/>
+              <a:rPr lang="ar-SA" dirty="0">
+                <a:latin typeface="Amiri" pitchFamily="2" charset="-78"/>
+                <a:ea typeface="Amiri" pitchFamily="2" charset="-78"/>
+                <a:cs typeface="Amiri" pitchFamily="2" charset="-78"/>
+              </a:rPr>
               <a:t>WELCOME (1 min) — while students join.
 • Greet each student by name as they arrive: السَّلَامُ عَلَيْكُمْ. Take the register (Pastoral Tracker: attendance 0/1).
 • 2-MINUTE CHECK-IN (SEND training): a private chat to any student who seemed unsettled last lesson — “Are you okay today? 👍 / 👎”.
@@ -2224,7 +2252,11 @@
           <a:lstStyle/>
           <a:p>
             <a:r>
-              <a:rPr lang="en-US" dirty="0"/>
+              <a:rPr lang="ar-SA" dirty="0">
+                <a:latin typeface="Amiri" pitchFamily="2" charset="-78"/>
+                <a:ea typeface="Amiri" pitchFamily="2" charset="-78"/>
+                <a:cs typeface="Amiri" pitchFamily="2" charset="-78"/>
+              </a:rPr>
               <a:t>TEACH (3 min). Role play = precise and complete; conversation = develop. Choral repetition of the repair phrases. To a girl: تُعِيدِي.</a:t>
             </a:r>
             <a:endParaRPr lang="en-US" dirty="0"/>
@@ -2312,7 +2344,11 @@
           <a:lstStyle/>
           <a:p>
             <a:r>
-              <a:rPr lang="en-US" dirty="0"/>
+              <a:rPr lang="ar-SA" dirty="0">
+                <a:latin typeface="Amiri" pitchFamily="2" charset="-78"/>
+                <a:ea typeface="Amiri" pitchFamily="2" charset="-78"/>
+                <a:cs typeface="Amiri" pitchFamily="2" charset="-78"/>
+              </a:rPr>
               <a:t>LANGUAGE BANK (2 min) — four persons for each verb. Advice: يَجِبُ أَنْ / يَنْبَغِي أَنْ + a verb in -a: يَجِبُ أَنْ نَشْرَبَ المَاءَ. Negative advice: يَجِبُ أَلَّا نَأْكُلَ … (allā = an + lā).</a:t>
             </a:r>
             <a:endParaRPr lang="en-US" dirty="0"/>
@@ -2400,7 +2436,11 @@
           <a:lstStyle/>
           <a:p>
             <a:r>
-              <a:rPr lang="en-US" dirty="0"/>
+              <a:rPr lang="ar-SA" dirty="0">
+                <a:latin typeface="Amiri" pitchFamily="2" charset="-78"/>
+                <a:ea typeface="Amiri" pitchFamily="2" charset="-78"/>
+                <a:cs typeface="Amiri" pitchFamily="2" charset="-78"/>
+              </a:rPr>
               <a:t>LANGUAGE BANK (2 min) — non-human plurals take the feminine singular: عَادَاتٌ صِحِّيَّةٌ · وَجَبَاتٌ سَرِيعَةٌ. People: هُمْ نَشِيطُونَ.</a:t>
             </a:r>
             <a:endParaRPr lang="en-US" dirty="0"/>
@@ -2576,7 +2616,11 @@
           <a:lstStyle/>
           <a:p>
             <a:r>
-              <a:rPr lang="en-US" dirty="0"/>
+              <a:rPr lang="ar-SA" dirty="0">
+                <a:latin typeface="Amiri" pitchFamily="2" charset="-78"/>
+                <a:ea typeface="Amiri" pitchFamily="2" charset="-78"/>
+                <a:cs typeface="Amiri" pitchFamily="2" charset="-78"/>
+              </a:rPr>
               <a:t>ROLE PLAY A (Core) — at the school nurse.
 SET-UP IN THE BREAKOUT ROOM: A = examiner (reads the left column ONLY — the questions, in order), B = candidate (sees the task column; Core may use the help column), C = observer (ticks the feedback checklist). 1 minute preparation, about 3 minutes speaking, 1 minute feedback, then rotate.
 Task ! is the unexpected question: in the exam the candidate has not seen it — the examiner should read it without warning.
@@ -2668,7 +2712,11 @@
           <a:lstStyle/>
           <a:p>
             <a:r>
-              <a:rPr lang="en-US" dirty="0"/>
+              <a:rPr lang="ar-SA" dirty="0">
+                <a:latin typeface="Amiri" pitchFamily="2" charset="-78"/>
+                <a:ea typeface="Amiri" pitchFamily="2" charset="-78"/>
+                <a:cs typeface="Amiri" pitchFamily="2" charset="-78"/>
+              </a:rPr>
               <a:t>ROLE PLAY B (Core+) — joining the gym.
 SET-UP IN THE BREAKOUT ROOM: A = examiner (reads the left column ONLY — the questions, in order), B = candidate (sees the task column; Core may use the help column), C = observer (ticks the feedback checklist). 1 minute preparation, about 3 minutes speaking, 1 minute feedback, then rotate.
 Task ! is the unexpected question: in the exam the candidate has not seen it — the examiner should read it without warning.
@@ -3156,6 +3204,7 @@
                   <a:srgbClr val="D4AF37"/>
                 </a:solidFill>
                 <a:latin typeface="Amiri" pitchFamily="2" charset="-78"/>
+                <a:ea typeface="Amiri" pitchFamily="2" charset="-78"/>
                 <a:cs typeface="Amiri" pitchFamily="2" charset="-78"/>
               </a:rPr>
               <a:t>م</a:t>
@@ -3362,6 +3411,7 @@
                   <a:srgbClr val="D4AF37"/>
                 </a:solidFill>
                 <a:latin typeface="Amiri" pitchFamily="2" charset="-78"/>
+                <a:ea typeface="Amiri" pitchFamily="2" charset="-78"/>
                 <a:cs typeface="Amiri" pitchFamily="2" charset="-78"/>
               </a:rPr>
               <a:t>وَرْشَةُ التَّحَدُّثِ — نَمَطُ الحَيَاةِ الصِّحِّيُّ</a:t>
@@ -3819,6 +3869,7 @@
                   <a:srgbClr val="D4AF37"/>
                 </a:solidFill>
                 <a:latin typeface="Amiri" pitchFamily="2" charset="-78"/>
+                <a:ea typeface="Amiri" pitchFamily="2" charset="-78"/>
                 <a:cs typeface="Amiri" pitchFamily="2" charset="-78"/>
               </a:rPr>
               <a:t>م</a:t>
@@ -4139,6 +4190,7 @@
                   <a:srgbClr val="8A6D1E"/>
                 </a:solidFill>
                 <a:latin typeface="Amiri" pitchFamily="2" charset="-78"/>
+                <a:ea typeface="Amiri" pitchFamily="2" charset="-78"/>
                 <a:cs typeface="Amiri" pitchFamily="2" charset="-78"/>
               </a:rPr>
               <a:t>صَدِيقٌ مُتْعَبٌ</a:t>
@@ -4419,6 +4471,7 @@
                   <a:srgbClr val="1B3B6F"/>
                 </a:solidFill>
                 <a:latin typeface="Amiri" pitchFamily="2" charset="-78"/>
+                <a:ea typeface="Amiri" pitchFamily="2" charset="-78"/>
                 <a:cs typeface="Amiri" pitchFamily="2" charset="-78"/>
               </a:rPr>
               <a:t>يَجِبُ أَنْ تَنَامَ …</a:t>
@@ -4495,6 +4548,7 @@
                   <a:srgbClr val="1B3B6F"/>
                 </a:solidFill>
                 <a:latin typeface="Amiri" pitchFamily="2" charset="-78"/>
+                <a:ea typeface="Amiri" pitchFamily="2" charset="-78"/>
                 <a:cs typeface="Amiri" pitchFamily="2" charset="-78"/>
               </a:rPr>
               <a:t>أَشْعُرُ بِالتَّعَبِ دَائِمًا. مَاذَا أَفْعَلُ؟</a:t>
@@ -4598,6 +4652,7 @@
                   <a:srgbClr val="1B3B6F"/>
                 </a:solidFill>
                 <a:latin typeface="Amiri" pitchFamily="2" charset="-78"/>
+                <a:ea typeface="Amiri" pitchFamily="2" charset="-78"/>
                 <a:cs typeface="Amiri" pitchFamily="2" charset="-78"/>
               </a:rPr>
               <a:t>يَنْبَغِي أَلَّا … لِأَنَّ …</a:t>
@@ -4674,6 +4729,7 @@
                   <a:srgbClr val="1B3B6F"/>
                 </a:solidFill>
                 <a:latin typeface="Amiri" pitchFamily="2" charset="-78"/>
+                <a:ea typeface="Amiri" pitchFamily="2" charset="-78"/>
                 <a:cs typeface="Amiri" pitchFamily="2" charset="-78"/>
               </a:rPr>
               <a:t>لٰكِنِّي أُحِبُّ الهَاتِفَ فِي اللَّيْلِ!</a:t>
@@ -4777,6 +4833,7 @@
                   <a:srgbClr val="1B3B6F"/>
                 </a:solidFill>
                 <a:latin typeface="Amiri" pitchFamily="2" charset="-78"/>
+                <a:ea typeface="Amiri" pitchFamily="2" charset="-78"/>
                 <a:cs typeface="Amiri" pitchFamily="2" charset="-78"/>
               </a:rPr>
               <a:t>كُلْ … وَتَجَنَّبْ …</a:t>
@@ -4853,6 +4910,7 @@
                   <a:srgbClr val="1B3B6F"/>
                 </a:solidFill>
                 <a:latin typeface="Amiri" pitchFamily="2" charset="-78"/>
+                <a:ea typeface="Amiri" pitchFamily="2" charset="-78"/>
                 <a:cs typeface="Amiri" pitchFamily="2" charset="-78"/>
               </a:rPr>
               <a:t>وَمَاذَا عَنِ الأَكْلِ؟</a:t>
@@ -4956,6 +5014,7 @@
                   <a:srgbClr val="1B3B6F"/>
                 </a:solidFill>
                 <a:latin typeface="Amiri" pitchFamily="2" charset="-78"/>
+                <a:ea typeface="Amiri" pitchFamily="2" charset="-78"/>
                 <a:cs typeface="Amiri" pitchFamily="2" charset="-78"/>
               </a:rPr>
               <a:t>أَيَّ رِيَاضَةٍ …؟</a:t>
@@ -5032,6 +5091,7 @@
                   <a:srgbClr val="1B3B6F"/>
                 </a:solidFill>
                 <a:latin typeface="Amiri" pitchFamily="2" charset="-78"/>
+                <a:ea typeface="Amiri" pitchFamily="2" charset="-78"/>
                 <a:cs typeface="Amiri" pitchFamily="2" charset="-78"/>
               </a:rPr>
               <a:t>… أَلْعَبُ أَلْعَابَ الفِيدْيُو فَقَطْ!</a:t>
@@ -5135,6 +5195,7 @@
                   <a:srgbClr val="1B3B6F"/>
                 </a:solidFill>
                 <a:latin typeface="Amiri" pitchFamily="2" charset="-78"/>
+                <a:ea typeface="Amiri" pitchFamily="2" charset="-78"/>
                 <a:cs typeface="Amiri" pitchFamily="2" charset="-78"/>
               </a:rPr>
               <a:t>نَعَمْ، سَآتِي …</a:t>
@@ -5211,6 +5272,7 @@
                   <a:srgbClr val="1B3B6F"/>
                 </a:solidFill>
                 <a:latin typeface="Amiri" pitchFamily="2" charset="-78"/>
+                <a:ea typeface="Amiri" pitchFamily="2" charset="-78"/>
                 <a:cs typeface="Amiri" pitchFamily="2" charset="-78"/>
               </a:rPr>
               <a:t>هَلْ تَأْتِي مَعِي إِلَى النَّادِي؟</a:t>
@@ -5420,6 +5482,7 @@
                   <a:srgbClr val="D4AF37"/>
                 </a:solidFill>
                 <a:latin typeface="Amiri" pitchFamily="2" charset="-78"/>
+                <a:ea typeface="Amiri" pitchFamily="2" charset="-78"/>
                 <a:cs typeface="Amiri" pitchFamily="2" charset="-78"/>
               </a:rPr>
               <a:t>م</a:t>
@@ -5740,6 +5803,7 @@
                   <a:srgbClr val="8A6D1E"/>
                 </a:solidFill>
                 <a:latin typeface="Amiri" pitchFamily="2" charset="-78"/>
+                <a:ea typeface="Amiri" pitchFamily="2" charset="-78"/>
                 <a:cs typeface="Amiri" pitchFamily="2" charset="-78"/>
               </a:rPr>
               <a:t>حَمْلَةُ الصِّحَّةِ فِي المَدْرَسَةِ</a:t>
@@ -6020,6 +6084,7 @@
                   <a:srgbClr val="1B3B6F"/>
                 </a:solidFill>
                 <a:latin typeface="Amiri" pitchFamily="2" charset="-78"/>
+                <a:ea typeface="Amiri" pitchFamily="2" charset="-78"/>
                 <a:cs typeface="Amiri" pitchFamily="2" charset="-78"/>
               </a:rPr>
               <a:t>نُرِيدُ أَنْ … لِكَيْ …</a:t>
@@ -6096,6 +6161,7 @@
                   <a:srgbClr val="1B3B6F"/>
                 </a:solidFill>
                 <a:latin typeface="Amiri" pitchFamily="2" charset="-78"/>
+                <a:ea typeface="Amiri" pitchFamily="2" charset="-78"/>
                 <a:cs typeface="Amiri" pitchFamily="2" charset="-78"/>
               </a:rPr>
               <a:t>مَا هَدَفُ حَمْلَتِكُمْ؟</a:t>
@@ -6199,6 +6265,7 @@
                   <a:srgbClr val="1B3B6F"/>
                 </a:solidFill>
                 <a:latin typeface="Amiri" pitchFamily="2" charset="-78"/>
+                <a:ea typeface="Amiri" pitchFamily="2" charset="-78"/>
                 <a:cs typeface="Amiri" pitchFamily="2" charset="-78"/>
               </a:rPr>
               <a:t>نَظَّمْنَا … وَوَزَّعْنَا …</a:t>
@@ -6275,6 +6342,7 @@
                   <a:srgbClr val="1B3B6F"/>
                 </a:solidFill>
                 <a:latin typeface="Amiri" pitchFamily="2" charset="-78"/>
+                <a:ea typeface="Amiri" pitchFamily="2" charset="-78"/>
                 <a:cs typeface="Amiri" pitchFamily="2" charset="-78"/>
               </a:rPr>
               <a:t>مَاذَا فَعَلْتُمْ حَتَّى الآنَ؟</a:t>
@@ -6378,6 +6446,7 @@
                   <a:srgbClr val="1B3B6F"/>
                 </a:solidFill>
                 <a:latin typeface="Amiri" pitchFamily="2" charset="-78"/>
+                <a:ea typeface="Amiri" pitchFamily="2" charset="-78"/>
                 <a:cs typeface="Amiri" pitchFamily="2" charset="-78"/>
               </a:rPr>
               <a:t>لِأَنَّهَا … وَلِأَنَّ …</a:t>
@@ -6454,6 +6523,7 @@
                   <a:srgbClr val="1B3B6F"/>
                 </a:solidFill>
                 <a:latin typeface="Amiri" pitchFamily="2" charset="-78"/>
+                <a:ea typeface="Amiri" pitchFamily="2" charset="-78"/>
                 <a:cs typeface="Amiri" pitchFamily="2" charset="-78"/>
               </a:rPr>
               <a:t>لِمَاذَا يَأْكُلُ الشَّبَابُ الوَجَبَاتِ السَّرِيعَةَ فِي رَأْيِكَ؟</a:t>
@@ -6557,6 +6627,7 @@
                   <a:srgbClr val="1B3B6F"/>
                 </a:solidFill>
                 <a:latin typeface="Amiri" pitchFamily="2" charset="-78"/>
+                <a:ea typeface="Amiri" pitchFamily="2" charset="-78"/>
                 <a:cs typeface="Amiri" pitchFamily="2" charset="-78"/>
               </a:rPr>
               <a:t>صَحِيحٌ أَنَّ … غَيْرَ أَنَّ …</a:t>
@@ -6633,6 +6704,7 @@
                   <a:srgbClr val="1B3B6F"/>
                 </a:solidFill>
                 <a:latin typeface="Amiri" pitchFamily="2" charset="-78"/>
+                <a:ea typeface="Amiri" pitchFamily="2" charset="-78"/>
                 <a:cs typeface="Amiri" pitchFamily="2" charset="-78"/>
               </a:rPr>
               <a:t>هَلْ الرِّيَاضَةُ أَهَمُّ مِنَ الأَكْلِ الصِّحِّيِّ؟</a:t>
@@ -6736,6 +6808,7 @@
                   <a:srgbClr val="1B3B6F"/>
                 </a:solidFill>
                 <a:latin typeface="Amiri" pitchFamily="2" charset="-78"/>
+                <a:ea typeface="Amiri" pitchFamily="2" charset="-78"/>
                 <a:cs typeface="Amiri" pitchFamily="2" charset="-78"/>
               </a:rPr>
               <a:t>لَوْ كُنْتُ …، لَمَنَعْتُ …</a:t>
@@ -6812,6 +6885,7 @@
                   <a:srgbClr val="1B3B6F"/>
                 </a:solidFill>
                 <a:latin typeface="Amiri" pitchFamily="2" charset="-78"/>
+                <a:ea typeface="Amiri" pitchFamily="2" charset="-78"/>
                 <a:cs typeface="Amiri" pitchFamily="2" charset="-78"/>
               </a:rPr>
               <a:t>لَوْ كُنْتَ مُدِيرَ المَدْرَسَةِ، مَاذَا تُغَيِّرُ؟</a:t>
@@ -7021,6 +7095,7 @@
                   <a:srgbClr val="D4AF37"/>
                 </a:solidFill>
                 <a:latin typeface="Amiri" pitchFamily="2" charset="-78"/>
+                <a:ea typeface="Amiri" pitchFamily="2" charset="-78"/>
                 <a:cs typeface="Amiri" pitchFamily="2" charset="-78"/>
               </a:rPr>
               <a:t>م</a:t>
@@ -7341,6 +7416,7 @@
                   <a:srgbClr val="8A6D1E"/>
                 </a:solidFill>
                 <a:latin typeface="Amiri" pitchFamily="2" charset="-78"/>
+                <a:ea typeface="Amiri" pitchFamily="2" charset="-78"/>
                 <a:cs typeface="Amiri" pitchFamily="2" charset="-78"/>
               </a:rPr>
               <a:t>وَرَقَةُ المُلَاحِظِ</a:t>
@@ -8811,6 +8887,7 @@
                   <a:srgbClr val="D4AF37"/>
                 </a:solidFill>
                 <a:latin typeface="Amiri" pitchFamily="2" charset="-78"/>
+                <a:ea typeface="Amiri" pitchFamily="2" charset="-78"/>
                 <a:cs typeface="Amiri" pitchFamily="2" charset="-78"/>
               </a:rPr>
               <a:t>م</a:t>
@@ -9131,6 +9208,7 @@
                   <a:srgbClr val="8A6D1E"/>
                 </a:solidFill>
                 <a:latin typeface="Amiri" pitchFamily="2" charset="-78"/>
+                <a:ea typeface="Amiri" pitchFamily="2" charset="-78"/>
                 <a:cs typeface="Amiri" pitchFamily="2" charset="-78"/>
               </a:rPr>
               <a:t>نَمُوذَجُ الإِجَابَةِ</a:t>
@@ -9373,6 +9451,7 @@
                   <a:srgbClr val="1B3B6F"/>
                 </a:solidFill>
                 <a:latin typeface="Amiri" pitchFamily="2" charset="-78"/>
+                <a:ea typeface="Amiri" pitchFamily="2" charset="-78"/>
                 <a:cs typeface="Amiri" pitchFamily="2" charset="-78"/>
               </a:rPr>
               <a:t>أَنَامُ ثَمَانِيَ سَاعَاتٍ فِي اللَّيْلِ.</a:t>
@@ -9449,6 +9528,7 @@
                   <a:srgbClr val="1B3B6F"/>
                 </a:solidFill>
                 <a:latin typeface="Amiri" pitchFamily="2" charset="-78"/>
+                <a:ea typeface="Amiri" pitchFamily="2" charset="-78"/>
                 <a:cs typeface="Amiri" pitchFamily="2" charset="-78"/>
               </a:rPr>
               <a:t>كَمْ سَاعَةً تَنَامُ فِي اللَّيْلِ؟</a:t>
@@ -9552,6 +9632,7 @@
                   <a:srgbClr val="1B3B6F"/>
                 </a:solidFill>
                 <a:latin typeface="Amiri" pitchFamily="2" charset="-78"/>
+                <a:ea typeface="Amiri" pitchFamily="2" charset="-78"/>
                 <a:cs typeface="Amiri" pitchFamily="2" charset="-78"/>
               </a:rPr>
               <a:t>آكُلُ الشُّوفَانَ مَعَ المَوْزِ، وَأَشْرَبُ الحَلِيبَ.</a:t>
@@ -9628,6 +9709,7 @@
                   <a:srgbClr val="1B3B6F"/>
                 </a:solidFill>
                 <a:latin typeface="Amiri" pitchFamily="2" charset="-78"/>
+                <a:ea typeface="Amiri" pitchFamily="2" charset="-78"/>
                 <a:cs typeface="Amiri" pitchFamily="2" charset="-78"/>
               </a:rPr>
               <a:t>مَاذَا تَأْكُلُ فِي الفُطُورِ؟</a:t>
@@ -9731,6 +9813,7 @@
                   <a:srgbClr val="1B3B6F"/>
                 </a:solidFill>
                 <a:latin typeface="Amiri" pitchFamily="2" charset="-78"/>
+                <a:ea typeface="Amiri" pitchFamily="2" charset="-78"/>
                 <a:cs typeface="Amiri" pitchFamily="2" charset="-78"/>
               </a:rPr>
               <a:t>نَعَمْ، أُمَارِسُ كُرَةَ القَدَمِ مَرَّتَيْنِ فِي الأُسْبُوعِ.</a:t>
@@ -9807,6 +9890,7 @@
                   <a:srgbClr val="1B3B6F"/>
                 </a:solidFill>
                 <a:latin typeface="Amiri" pitchFamily="2" charset="-78"/>
+                <a:ea typeface="Amiri" pitchFamily="2" charset="-78"/>
                 <a:cs typeface="Amiri" pitchFamily="2" charset="-78"/>
               </a:rPr>
               <a:t>هَلْ تُمَارِسُ الرِّيَاضَةَ؟</a:t>
@@ -9910,6 +9994,7 @@
                   <a:srgbClr val="1B3B6F"/>
                 </a:solidFill>
                 <a:latin typeface="Amiri" pitchFamily="2" charset="-78"/>
+                <a:ea typeface="Amiri" pitchFamily="2" charset="-78"/>
                 <a:cs typeface="Amiri" pitchFamily="2" charset="-78"/>
               </a:rPr>
               <a:t>أَشْرَبُ خَمْسَةَ أَكْوَابٍ مِنَ المَاءِ كُلَّ يَوْمٍ.</a:t>
@@ -9986,6 +10071,7 @@
                   <a:srgbClr val="1B3B6F"/>
                 </a:solidFill>
                 <a:latin typeface="Amiri" pitchFamily="2" charset="-78"/>
+                <a:ea typeface="Amiri" pitchFamily="2" charset="-78"/>
                 <a:cs typeface="Amiri" pitchFamily="2" charset="-78"/>
               </a:rPr>
               <a:t>كَمْ كُوبًا مِنَ المَاءِ تَشْرَبُ؟</a:t>
@@ -10089,6 +10175,7 @@
                   <a:srgbClr val="1B3B6F"/>
                 </a:solidFill>
                 <a:latin typeface="Amiri" pitchFamily="2" charset="-78"/>
+                <a:ea typeface="Amiri" pitchFamily="2" charset="-78"/>
                 <a:cs typeface="Amiri" pitchFamily="2" charset="-78"/>
               </a:rPr>
               <a:t>لَا، آكُلُهَا أَحْيَانًا فَقَطْ، فِي نِهَايَةِ الأُسْبُوعِ.</a:t>
@@ -10165,6 +10252,7 @@
                   <a:srgbClr val="1B3B6F"/>
                 </a:solidFill>
                 <a:latin typeface="Amiri" pitchFamily="2" charset="-78"/>
+                <a:ea typeface="Amiri" pitchFamily="2" charset="-78"/>
                 <a:cs typeface="Amiri" pitchFamily="2" charset="-78"/>
               </a:rPr>
               <a:t>هَلْ تَأْكُلُ الحَلَوِيَّاتِ كَثِيرًا؟</a:t>
@@ -10374,6 +10462,7 @@
                   <a:srgbClr val="D4AF37"/>
                 </a:solidFill>
                 <a:latin typeface="Amiri" pitchFamily="2" charset="-78"/>
+                <a:ea typeface="Amiri" pitchFamily="2" charset="-78"/>
                 <a:cs typeface="Amiri" pitchFamily="2" charset="-78"/>
               </a:rPr>
               <a:t>م</a:t>
@@ -10694,6 +10783,7 @@
                   <a:srgbClr val="8A6D1E"/>
                 </a:solidFill>
                 <a:latin typeface="Amiri" pitchFamily="2" charset="-78"/>
+                <a:ea typeface="Amiri" pitchFamily="2" charset="-78"/>
                 <a:cs typeface="Amiri" pitchFamily="2" charset="-78"/>
               </a:rPr>
               <a:t>نَمُوذَجُ الإِجَابَةِ</a:t>
@@ -10936,6 +11026,7 @@
                   <a:srgbClr val="1B3B6F"/>
                 </a:solidFill>
                 <a:latin typeface="Amiri" pitchFamily="2" charset="-78"/>
+                <a:ea typeface="Amiri" pitchFamily="2" charset="-78"/>
                 <a:cs typeface="Amiri" pitchFamily="2" charset="-78"/>
               </a:rPr>
               <a:t>أُرِيدُ أَنْ أَكُونَ نَشِيطًا وَصِحِّيًّا أَكْثَرَ.</a:t>
@@ -11012,6 +11103,7 @@
                   <a:srgbClr val="1B3B6F"/>
                 </a:solidFill>
                 <a:latin typeface="Amiri" pitchFamily="2" charset="-78"/>
+                <a:ea typeface="Amiri" pitchFamily="2" charset="-78"/>
                 <a:cs typeface="Amiri" pitchFamily="2" charset="-78"/>
               </a:rPr>
               <a:t>لِمَاذَا تُرِيدُ أَنْ تَشْتَرِكَ؟</a:t>
@@ -11115,6 +11207,7 @@
                   <a:srgbClr val="1B3B6F"/>
                 </a:solidFill>
                 <a:latin typeface="Amiri" pitchFamily="2" charset="-78"/>
+                <a:ea typeface="Amiri" pitchFamily="2" charset="-78"/>
                 <a:cs typeface="Amiri" pitchFamily="2" charset="-78"/>
               </a:rPr>
               <a:t>أُحِبُّ السِّبَاحَةَ لِأَنَّهَا مُمْتِعَةٌ.</a:t>
@@ -11191,6 +11284,7 @@
                   <a:srgbClr val="1B3B6F"/>
                 </a:solidFill>
                 <a:latin typeface="Amiri" pitchFamily="2" charset="-78"/>
+                <a:ea typeface="Amiri" pitchFamily="2" charset="-78"/>
                 <a:cs typeface="Amiri" pitchFamily="2" charset="-78"/>
               </a:rPr>
               <a:t>أَيَّ رِيَاضَةٍ تُحِبُّ؟</a:t>
@@ -11294,6 +11388,7 @@
                   <a:srgbClr val="1B3B6F"/>
                 </a:solidFill>
                 <a:latin typeface="Amiri" pitchFamily="2" charset="-78"/>
+                <a:ea typeface="Amiri" pitchFamily="2" charset="-78"/>
                 <a:cs typeface="Amiri" pitchFamily="2" charset="-78"/>
               </a:rPr>
               <a:t>أَسْتَطِيعُ أَنْ آتِيَ يَوْمَ السَّبْتِ وَيَوْمَ الأَرْبِعَاءِ بَعْدَ المَدْرَسَةِ.</a:t>
@@ -11370,6 +11465,7 @@
                   <a:srgbClr val="1B3B6F"/>
                 </a:solidFill>
                 <a:latin typeface="Amiri" pitchFamily="2" charset="-78"/>
+                <a:ea typeface="Amiri" pitchFamily="2" charset="-78"/>
                 <a:cs typeface="Amiri" pitchFamily="2" charset="-78"/>
               </a:rPr>
               <a:t>مَتَى تَسْتَطِيعُ أَنْ تَأْتِيَ؟</a:t>
@@ -11473,6 +11569,7 @@
                   <a:srgbClr val="1B3B6F"/>
                 </a:solidFill>
                 <a:latin typeface="Amiri" pitchFamily="2" charset="-78"/>
+                <a:ea typeface="Amiri" pitchFamily="2" charset="-78"/>
                 <a:cs typeface="Amiri" pitchFamily="2" charset="-78"/>
               </a:rPr>
               <a:t>مَاذَا يَنْبَغِي أَنْ آكُلَ قَبْلَ التَّدْرِيبِ؟</a:t>
@@ -11549,6 +11646,7 @@
                   <a:srgbClr val="1B3B6F"/>
                 </a:solidFill>
                 <a:latin typeface="Amiri" pitchFamily="2" charset="-78"/>
+                <a:ea typeface="Amiri" pitchFamily="2" charset="-78"/>
                 <a:cs typeface="Amiri" pitchFamily="2" charset="-78"/>
               </a:rPr>
               <a:t>… يَجِبُ أَنْ تَأْكُلَ قَبْلَ التَّدْرِيبِ بِسَاعَتَيْنِ.</a:t>
@@ -11652,6 +11750,7 @@
                   <a:srgbClr val="1B3B6F"/>
                 </a:solidFill>
                 <a:latin typeface="Amiri" pitchFamily="2" charset="-78"/>
+                <a:ea typeface="Amiri" pitchFamily="2" charset="-78"/>
                 <a:cs typeface="Amiri" pitchFamily="2" charset="-78"/>
               </a:rPr>
               <a:t>لَا، لَيْسَ عِنْدِي أَيُّ مُشْكِلَةٍ، وَالحَمْدُ لِلّٰهِ.</a:t>
@@ -11728,6 +11827,7 @@
                   <a:srgbClr val="1B3B6F"/>
                 </a:solidFill>
                 <a:latin typeface="Amiri" pitchFamily="2" charset="-78"/>
+                <a:ea typeface="Amiri" pitchFamily="2" charset="-78"/>
                 <a:cs typeface="Amiri" pitchFamily="2" charset="-78"/>
               </a:rPr>
               <a:t>هَلْ عِنْدَكَ أَيُّ مُشْكِلَةٍ صِحِّيَّةٍ؟</a:t>
@@ -11937,6 +12037,7 @@
                   <a:srgbClr val="D4AF37"/>
                 </a:solidFill>
                 <a:latin typeface="Amiri" pitchFamily="2" charset="-78"/>
+                <a:ea typeface="Amiri" pitchFamily="2" charset="-78"/>
                 <a:cs typeface="Amiri" pitchFamily="2" charset="-78"/>
               </a:rPr>
               <a:t>م</a:t>
@@ -12257,6 +12358,7 @@
                   <a:srgbClr val="8A6D1E"/>
                 </a:solidFill>
                 <a:latin typeface="Amiri" pitchFamily="2" charset="-78"/>
+                <a:ea typeface="Amiri" pitchFamily="2" charset="-78"/>
                 <a:cs typeface="Amiri" pitchFamily="2" charset="-78"/>
               </a:rPr>
               <a:t>نَمُوذَجُ الإِجَابَةِ</a:t>
@@ -12499,6 +12601,7 @@
                   <a:srgbClr val="1B3B6F"/>
                 </a:solidFill>
                 <a:latin typeface="Amiri" pitchFamily="2" charset="-78"/>
+                <a:ea typeface="Amiri" pitchFamily="2" charset="-78"/>
                 <a:cs typeface="Amiri" pitchFamily="2" charset="-78"/>
               </a:rPr>
               <a:t>يَجِبُ أَنْ تَنَامَ مُبَكِّرًا، ثَمَانِيَ سَاعَاتٍ عَلَى الأَقَلِّ.</a:t>
@@ -12575,6 +12678,7 @@
                   <a:srgbClr val="1B3B6F"/>
                 </a:solidFill>
                 <a:latin typeface="Amiri" pitchFamily="2" charset="-78"/>
+                <a:ea typeface="Amiri" pitchFamily="2" charset="-78"/>
                 <a:cs typeface="Amiri" pitchFamily="2" charset="-78"/>
               </a:rPr>
               <a:t>أَشْعُرُ بِالتَّعَبِ دَائِمًا. مَاذَا أَفْعَلُ؟</a:t>
@@ -12678,6 +12782,7 @@
                   <a:srgbClr val="1B3B6F"/>
                 </a:solidFill>
                 <a:latin typeface="Amiri" pitchFamily="2" charset="-78"/>
+                <a:ea typeface="Amiri" pitchFamily="2" charset="-78"/>
                 <a:cs typeface="Amiri" pitchFamily="2" charset="-78"/>
               </a:rPr>
               <a:t>يَنْبَغِي أَلَّا تَسْتَعْمِلَ الهَاتِفَ قَبْلَ النَّوْمِ، لِأَنَّ الضَّوْءَ يُبْعِدُ النَّوْمَ.</a:t>
@@ -12754,6 +12859,7 @@
                   <a:srgbClr val="1B3B6F"/>
                 </a:solidFill>
                 <a:latin typeface="Amiri" pitchFamily="2" charset="-78"/>
+                <a:ea typeface="Amiri" pitchFamily="2" charset="-78"/>
                 <a:cs typeface="Amiri" pitchFamily="2" charset="-78"/>
               </a:rPr>
               <a:t>لٰكِنِّي أُحِبُّ الهَاتِفَ فِي اللَّيْلِ!</a:t>
@@ -12857,6 +12963,7 @@
                   <a:srgbClr val="1B3B6F"/>
                 </a:solidFill>
                 <a:latin typeface="Amiri" pitchFamily="2" charset="-78"/>
+                <a:ea typeface="Amiri" pitchFamily="2" charset="-78"/>
                 <a:cs typeface="Amiri" pitchFamily="2" charset="-78"/>
               </a:rPr>
               <a:t>كُلِ الخُضَارَ وَالفَوَاكِهَ، وَتَجَنَّبِ الوَجَبَاتِ السَّرِيعَةَ وَالسُّكَّرَ.</a:t>
@@ -12933,6 +13040,7 @@
                   <a:srgbClr val="1B3B6F"/>
                 </a:solidFill>
                 <a:latin typeface="Amiri" pitchFamily="2" charset="-78"/>
+                <a:ea typeface="Amiri" pitchFamily="2" charset="-78"/>
                 <a:cs typeface="Amiri" pitchFamily="2" charset="-78"/>
               </a:rPr>
               <a:t>وَمَاذَا عَنِ الأَكْلِ؟</a:t>
@@ -13036,6 +13144,7 @@
                   <a:srgbClr val="1B3B6F"/>
                 </a:solidFill>
                 <a:latin typeface="Amiri" pitchFamily="2" charset="-78"/>
+                <a:ea typeface="Amiri" pitchFamily="2" charset="-78"/>
                 <a:cs typeface="Amiri" pitchFamily="2" charset="-78"/>
               </a:rPr>
               <a:t>وَأَيَّ رِيَاضَةٍ تُمَارِسُ؟</a:t>
@@ -13112,6 +13221,7 @@
                   <a:srgbClr val="1B3B6F"/>
                 </a:solidFill>
                 <a:latin typeface="Amiri" pitchFamily="2" charset="-78"/>
+                <a:ea typeface="Amiri" pitchFamily="2" charset="-78"/>
                 <a:cs typeface="Amiri" pitchFamily="2" charset="-78"/>
               </a:rPr>
               <a:t>… أَلْعَبُ أَلْعَابَ الفِيدْيُو فَقَطْ!</a:t>
@@ -13215,6 +13325,7 @@
                   <a:srgbClr val="1B3B6F"/>
                 </a:solidFill>
                 <a:latin typeface="Amiri" pitchFamily="2" charset="-78"/>
+                <a:ea typeface="Amiri" pitchFamily="2" charset="-78"/>
                 <a:cs typeface="Amiri" pitchFamily="2" charset="-78"/>
               </a:rPr>
               <a:t>نَعَمْ، سَآتِي مَعَكَ يَوْمَ السَّبْتِ، وَسَنَمْشِي سَاعَةً فِي الحَدِيقَةِ بَعْدَ ذٰلِكَ.</a:t>
@@ -13291,6 +13402,7 @@
                   <a:srgbClr val="1B3B6F"/>
                 </a:solidFill>
                 <a:latin typeface="Amiri" pitchFamily="2" charset="-78"/>
+                <a:ea typeface="Amiri" pitchFamily="2" charset="-78"/>
                 <a:cs typeface="Amiri" pitchFamily="2" charset="-78"/>
               </a:rPr>
               <a:t>هَلْ تَأْتِي مَعِي إِلَى النَّادِي؟</a:t>
@@ -13500,6 +13612,7 @@
                   <a:srgbClr val="D4AF37"/>
                 </a:solidFill>
                 <a:latin typeface="Amiri" pitchFamily="2" charset="-78"/>
+                <a:ea typeface="Amiri" pitchFamily="2" charset="-78"/>
                 <a:cs typeface="Amiri" pitchFamily="2" charset="-78"/>
               </a:rPr>
               <a:t>م</a:t>
@@ -13820,6 +13933,7 @@
                   <a:srgbClr val="8A6D1E"/>
                 </a:solidFill>
                 <a:latin typeface="Amiri" pitchFamily="2" charset="-78"/>
+                <a:ea typeface="Amiri" pitchFamily="2" charset="-78"/>
                 <a:cs typeface="Amiri" pitchFamily="2" charset="-78"/>
               </a:rPr>
               <a:t>نَمُوذَجُ الإِجَابَةِ</a:t>
@@ -14062,6 +14176,7 @@
                   <a:srgbClr val="1B3B6F"/>
                 </a:solidFill>
                 <a:latin typeface="Amiri" pitchFamily="2" charset="-78"/>
+                <a:ea typeface="Amiri" pitchFamily="2" charset="-78"/>
                 <a:cs typeface="Amiri" pitchFamily="2" charset="-78"/>
               </a:rPr>
               <a:t>نُرِيدُ أَنْ نُشَجِّعَ الطُّلَّابَ عَلَى الأَكْلِ الصِّحِّيِّ، لِكَيْ يَكُونُوا أَنْشَطَ فِي الدِّرَاسَةِ.</a:t>
@@ -14138,6 +14253,7 @@
                   <a:srgbClr val="1B3B6F"/>
                 </a:solidFill>
                 <a:latin typeface="Amiri" pitchFamily="2" charset="-78"/>
+                <a:ea typeface="Amiri" pitchFamily="2" charset="-78"/>
                 <a:cs typeface="Amiri" pitchFamily="2" charset="-78"/>
               </a:rPr>
               <a:t>مَا هَدَفُ حَمْلَتِكُمْ؟</a:t>
@@ -14241,6 +14357,7 @@
                   <a:srgbClr val="1B3B6F"/>
                 </a:solidFill>
                 <a:latin typeface="Amiri" pitchFamily="2" charset="-78"/>
+                <a:ea typeface="Amiri" pitchFamily="2" charset="-78"/>
                 <a:cs typeface="Amiri" pitchFamily="2" charset="-78"/>
               </a:rPr>
               <a:t>نَظَّمْنَا يَوْمًا لِلْفَوَاكِهِ فِي المَقْصَفِ، وَوَزَّعْنَا مَلْصَقَاتٍ عَنْ أَهَمِّيَّةِ المَاءِ.</a:t>
@@ -14317,6 +14434,7 @@
                   <a:srgbClr val="1B3B6F"/>
                 </a:solidFill>
                 <a:latin typeface="Amiri" pitchFamily="2" charset="-78"/>
+                <a:ea typeface="Amiri" pitchFamily="2" charset="-78"/>
                 <a:cs typeface="Amiri" pitchFamily="2" charset="-78"/>
               </a:rPr>
               <a:t>مَاذَا فَعَلْتُمْ حَتَّى الآنَ؟</a:t>
@@ -14420,6 +14538,7 @@
                   <a:srgbClr val="1B3B6F"/>
                 </a:solidFill>
                 <a:latin typeface="Amiri" pitchFamily="2" charset="-78"/>
+                <a:ea typeface="Amiri" pitchFamily="2" charset="-78"/>
                 <a:cs typeface="Amiri" pitchFamily="2" charset="-78"/>
               </a:rPr>
               <a:t>لِأَنَّهَا رَخِيصَةٌ وَسَرِيعَةٌ، وَلِأَنَّ الإِعْلَانَاتِ تُشَجِّعُهُمْ عَلَيْهَا كُلَّ يَوْمٍ.</a:t>
@@ -14496,6 +14615,7 @@
                   <a:srgbClr val="1B3B6F"/>
                 </a:solidFill>
                 <a:latin typeface="Amiri" pitchFamily="2" charset="-78"/>
+                <a:ea typeface="Amiri" pitchFamily="2" charset="-78"/>
                 <a:cs typeface="Amiri" pitchFamily="2" charset="-78"/>
               </a:rPr>
               <a:t>لِمَاذَا يَأْكُلُ الشَّبَابُ الوَجَبَاتِ السَّرِيعَةَ فِي رَأْيِكَ؟</a:t>
@@ -14599,6 +14719,7 @@
                   <a:srgbClr val="1B3B6F"/>
                 </a:solidFill>
                 <a:latin typeface="Amiri" pitchFamily="2" charset="-78"/>
+                <a:ea typeface="Amiri" pitchFamily="2" charset="-78"/>
                 <a:cs typeface="Amiri" pitchFamily="2" charset="-78"/>
               </a:rPr>
               <a:t>صَحِيحٌ أَنَّ الرِّيَاضَةَ مُهِمَّةٌ جِدًّا، غَيْرَ أَنَّهَا لَا تَكْفِي إِذَا كَانَ الطَّعَامُ غَيْرَ صِحِّيٍّ.</a:t>
@@ -14675,6 +14796,7 @@
                   <a:srgbClr val="1B3B6F"/>
                 </a:solidFill>
                 <a:latin typeface="Amiri" pitchFamily="2" charset="-78"/>
+                <a:ea typeface="Amiri" pitchFamily="2" charset="-78"/>
                 <a:cs typeface="Amiri" pitchFamily="2" charset="-78"/>
               </a:rPr>
               <a:t>هَلْ الرِّيَاضَةُ أَهَمُّ مِنَ الأَكْلِ الصِّحِّيِّ؟</a:t>
@@ -14778,6 +14900,7 @@
                   <a:srgbClr val="1B3B6F"/>
                 </a:solidFill>
                 <a:latin typeface="Amiri" pitchFamily="2" charset="-78"/>
+                <a:ea typeface="Amiri" pitchFamily="2" charset="-78"/>
                 <a:cs typeface="Amiri" pitchFamily="2" charset="-78"/>
               </a:rPr>
               <a:t>لَوْ كُنْتُ مُدِيرَ المَدْرَسَةِ، لَمَنَعْتُ المَشْرُوبَاتِ الغَازِيَّةَ، وَلَأَضَفْتُ حِصَّةَ رِيَاضَةٍ ثَالِثَةً.</a:t>
@@ -14854,6 +14977,7 @@
                   <a:srgbClr val="1B3B6F"/>
                 </a:solidFill>
                 <a:latin typeface="Amiri" pitchFamily="2" charset="-78"/>
+                <a:ea typeface="Amiri" pitchFamily="2" charset="-78"/>
                 <a:cs typeface="Amiri" pitchFamily="2" charset="-78"/>
               </a:rPr>
               <a:t>لَوْ كُنْتَ مُدِيرَ المَدْرَسَةِ، مَاذَا تُغَيِّرُ؟</a:t>
@@ -15063,6 +15187,7 @@
                   <a:srgbClr val="D4AF37"/>
                 </a:solidFill>
                 <a:latin typeface="Amiri" pitchFamily="2" charset="-78"/>
+                <a:ea typeface="Amiri" pitchFamily="2" charset="-78"/>
                 <a:cs typeface="Amiri" pitchFamily="2" charset="-78"/>
               </a:rPr>
               <a:t>م</a:t>
@@ -15383,6 +15508,7 @@
                   <a:srgbClr val="8A6D1E"/>
                 </a:solidFill>
                 <a:latin typeface="Amiri" pitchFamily="2" charset="-78"/>
+                <a:ea typeface="Amiri" pitchFamily="2" charset="-78"/>
                 <a:cs typeface="Amiri" pitchFamily="2" charset="-78"/>
               </a:rPr>
               <a:t>صِحَّتِي</a:t>
@@ -15663,6 +15789,7 @@
                   <a:srgbClr val="1B3B6F"/>
                 </a:solidFill>
                 <a:latin typeface="Amiri" pitchFamily="2" charset="-78"/>
+                <a:ea typeface="Amiri" pitchFamily="2" charset="-78"/>
                 <a:cs typeface="Amiri" pitchFamily="2" charset="-78"/>
               </a:rPr>
               <a:t>نَعَمْ، آكُلُ …</a:t>
@@ -15739,6 +15866,7 @@
                   <a:srgbClr val="1B3B6F"/>
                 </a:solidFill>
                 <a:latin typeface="Amiri" pitchFamily="2" charset="-78"/>
+                <a:ea typeface="Amiri" pitchFamily="2" charset="-78"/>
                 <a:cs typeface="Amiri" pitchFamily="2" charset="-78"/>
               </a:rPr>
               <a:t>هَلْ تَأْكُلُ طَعَامًا صِحِّيًّا؟</a:t>
@@ -15907,6 +16035,7 @@
                   <a:srgbClr val="1B3B6F"/>
                 </a:solidFill>
                 <a:latin typeface="Amiri" pitchFamily="2" charset="-78"/>
+                <a:ea typeface="Amiri" pitchFamily="2" charset="-78"/>
                 <a:cs typeface="Amiri" pitchFamily="2" charset="-78"/>
               </a:rPr>
               <a:t>أَنَامُ … سَاعَاتٍ</a:t>
@@ -15983,6 +16112,7 @@
                   <a:srgbClr val="1B3B6F"/>
                 </a:solidFill>
                 <a:latin typeface="Amiri" pitchFamily="2" charset="-78"/>
+                <a:ea typeface="Amiri" pitchFamily="2" charset="-78"/>
                 <a:cs typeface="Amiri" pitchFamily="2" charset="-78"/>
               </a:rPr>
               <a:t>كَمْ سَاعَةً تَنَامُ؟</a:t>
@@ -16151,6 +16281,7 @@
                   <a:srgbClr val="1B3B6F"/>
                 </a:solidFill>
                 <a:latin typeface="Amiri" pitchFamily="2" charset="-78"/>
+                <a:ea typeface="Amiri" pitchFamily="2" charset="-78"/>
                 <a:cs typeface="Amiri" pitchFamily="2" charset="-78"/>
               </a:rPr>
               <a:t>رِيَاضَتِي المُفَضَّلَةُ …</a:t>
@@ -16227,6 +16358,7 @@
                   <a:srgbClr val="1B3B6F"/>
                 </a:solidFill>
                 <a:latin typeface="Amiri" pitchFamily="2" charset="-78"/>
+                <a:ea typeface="Amiri" pitchFamily="2" charset="-78"/>
                 <a:cs typeface="Amiri" pitchFamily="2" charset="-78"/>
               </a:rPr>
               <a:t>مَا رِيَاضَتُكَ المُفَضَّلَةُ؟</a:t>
@@ -16395,6 +16527,7 @@
                   <a:srgbClr val="1B3B6F"/>
                 </a:solidFill>
                 <a:latin typeface="Amiri" pitchFamily="2" charset="-78"/>
+                <a:ea typeface="Amiri" pitchFamily="2" charset="-78"/>
                 <a:cs typeface="Amiri" pitchFamily="2" charset="-78"/>
               </a:rPr>
               <a:t>أَشْرَبُ … عَادَةً</a:t>
@@ -16471,6 +16604,7 @@
                   <a:srgbClr val="1B3B6F"/>
                 </a:solidFill>
                 <a:latin typeface="Amiri" pitchFamily="2" charset="-78"/>
+                <a:ea typeface="Amiri" pitchFamily="2" charset="-78"/>
                 <a:cs typeface="Amiri" pitchFamily="2" charset="-78"/>
               </a:rPr>
               <a:t>مَاذَا تَشْرَبُ عَادَةً؟</a:t>
@@ -16639,6 +16773,7 @@
                   <a:srgbClr val="1B3B6F"/>
                 </a:solidFill>
                 <a:latin typeface="Amiri" pitchFamily="2" charset="-78"/>
+                <a:ea typeface="Amiri" pitchFamily="2" charset="-78"/>
                 <a:cs typeface="Amiri" pitchFamily="2" charset="-78"/>
               </a:rPr>
               <a:t>نَعَمْ / لَا، …</a:t>
@@ -16715,6 +16850,7 @@
                   <a:srgbClr val="1B3B6F"/>
                 </a:solidFill>
                 <a:latin typeface="Amiri" pitchFamily="2" charset="-78"/>
+                <a:ea typeface="Amiri" pitchFamily="2" charset="-78"/>
                 <a:cs typeface="Amiri" pitchFamily="2" charset="-78"/>
               </a:rPr>
               <a:t>هَلْ تُحِبُّ الوَجَبَاتِ السَّرِيعَةَ؟</a:t>
@@ -16869,6 +17005,7 @@
                   <a:srgbClr val="1B3B6F"/>
                 </a:solidFill>
                 <a:latin typeface="Amiri" pitchFamily="2" charset="-78"/>
+                <a:ea typeface="Amiri" pitchFamily="2" charset="-78"/>
                 <a:cs typeface="Amiri" pitchFamily="2" charset="-78"/>
               </a:rPr>
               <a:t>عَفْوًا، هَلْ يُمْكِنُ أَنْ تُعِيدَ السُّؤَالَ؟</a:t>
@@ -17002,6 +17139,7 @@
                   <a:srgbClr val="D4AF37"/>
                 </a:solidFill>
                 <a:latin typeface="Amiri" pitchFamily="2" charset="-78"/>
+                <a:ea typeface="Amiri" pitchFamily="2" charset="-78"/>
                 <a:cs typeface="Amiri" pitchFamily="2" charset="-78"/>
               </a:rPr>
               <a:t>م</a:t>
@@ -17322,6 +17460,7 @@
                   <a:srgbClr val="8A6D1E"/>
                 </a:solidFill>
                 <a:latin typeface="Amiri" pitchFamily="2" charset="-78"/>
+                <a:ea typeface="Amiri" pitchFamily="2" charset="-78"/>
                 <a:cs typeface="Amiri" pitchFamily="2" charset="-78"/>
               </a:rPr>
               <a:t>عَادَاتِي الصِّحِّيَّةُ</a:t>
@@ -17602,6 +17741,7 @@
                   <a:srgbClr val="1B3B6F"/>
                 </a:solidFill>
                 <a:latin typeface="Amiri" pitchFamily="2" charset="-78"/>
+                <a:ea typeface="Amiri" pitchFamily="2" charset="-78"/>
                 <a:cs typeface="Amiri" pitchFamily="2" charset="-78"/>
               </a:rPr>
               <a:t>أَسْتَيْقِظُ … ثُمَّ … وَفِي المَسَاءِ …</a:t>
@@ -17678,6 +17818,7 @@
                   <a:srgbClr val="1B3B6F"/>
                 </a:solidFill>
                 <a:latin typeface="Amiri" pitchFamily="2" charset="-78"/>
+                <a:ea typeface="Amiri" pitchFamily="2" charset="-78"/>
                 <a:cs typeface="Amiri" pitchFamily="2" charset="-78"/>
               </a:rPr>
               <a:t>صِفْ يَوْمًا صِحِّيًّا فِي حَيَاتِكَ.</a:t>
@@ -17781,6 +17922,7 @@
                   <a:srgbClr val="1B3B6F"/>
                 </a:solidFill>
                 <a:latin typeface="Amiri" pitchFamily="2" charset="-78"/>
+                <a:ea typeface="Amiri" pitchFamily="2" charset="-78"/>
                 <a:cs typeface="Amiri" pitchFamily="2" charset="-78"/>
               </a:rPr>
               <a:t>أَحْيَانًا … لٰكِنِّي أُحَاوِلُ …</a:t>
@@ -17857,6 +17999,7 @@
                   <a:srgbClr val="1B3B6F"/>
                 </a:solidFill>
                 <a:latin typeface="Amiri" pitchFamily="2" charset="-78"/>
+                <a:ea typeface="Amiri" pitchFamily="2" charset="-78"/>
                 <a:cs typeface="Amiri" pitchFamily="2" charset="-78"/>
               </a:rPr>
               <a:t>مَا العَادَةُ غَيْرُ الصِّحِّيَّةِ الَّتِي عِنْدَكَ؟</a:t>
@@ -17960,6 +18103,7 @@
                   <a:srgbClr val="1B3B6F"/>
                 </a:solidFill>
                 <a:latin typeface="Amiri" pitchFamily="2" charset="-78"/>
+                <a:ea typeface="Amiri" pitchFamily="2" charset="-78"/>
                 <a:cs typeface="Amiri" pitchFamily="2" charset="-78"/>
               </a:rPr>
               <a:t>يَجِبُ أَنْ … لِأَنَّ …</a:t>
@@ -18036,6 +18180,7 @@
                   <a:srgbClr val="1B3B6F"/>
                 </a:solidFill>
                 <a:latin typeface="Amiri" pitchFamily="2" charset="-78"/>
+                <a:ea typeface="Amiri" pitchFamily="2" charset="-78"/>
                 <a:cs typeface="Amiri" pitchFamily="2" charset="-78"/>
               </a:rPr>
               <a:t>مَا نَصِيحَتُكَ لِطَالِبٍ لَا يَأْكُلُ الفُطُورَ؟</a:t>
@@ -18139,6 +18284,7 @@
                   <a:srgbClr val="1B3B6F"/>
                 </a:solidFill>
                 <a:latin typeface="Amiri" pitchFamily="2" charset="-78"/>
+                <a:ea typeface="Amiri" pitchFamily="2" charset="-78"/>
                 <a:cs typeface="Amiri" pitchFamily="2" charset="-78"/>
               </a:rPr>
               <a:t>نَعَمْ، … مَعَ … يَوْمَ …</a:t>
@@ -18215,6 +18361,7 @@
                   <a:srgbClr val="1B3B6F"/>
                 </a:solidFill>
                 <a:latin typeface="Amiri" pitchFamily="2" charset="-78"/>
+                <a:ea typeface="Amiri" pitchFamily="2" charset="-78"/>
                 <a:cs typeface="Amiri" pitchFamily="2" charset="-78"/>
               </a:rPr>
               <a:t>هَلْ تُمَارِسُ الرِّيَاضَةَ مَعَ أُسْرَتِكَ؟</a:t>
@@ -18318,6 +18465,7 @@
                   <a:srgbClr val="1B3B6F"/>
                 </a:solidFill>
                 <a:latin typeface="Amiri" pitchFamily="2" charset="-78"/>
+                <a:ea typeface="Amiri" pitchFamily="2" charset="-78"/>
                 <a:cs typeface="Amiri" pitchFamily="2" charset="-78"/>
               </a:rPr>
               <a:t>أَمْسِ أَكَلْتُ … وَكَانَ …</a:t>
@@ -18394,6 +18542,7 @@
                   <a:srgbClr val="1B3B6F"/>
                 </a:solidFill>
                 <a:latin typeface="Amiri" pitchFamily="2" charset="-78"/>
+                <a:ea typeface="Amiri" pitchFamily="2" charset="-78"/>
                 <a:cs typeface="Amiri" pitchFamily="2" charset="-78"/>
               </a:rPr>
               <a:t>مَاذَا أَكَلْتَ أَمْسِ؟ هَلْ كَانَ صِحِّيًّا؟</a:t>
@@ -18603,6 +18752,7 @@
                   <a:srgbClr val="D4AF37"/>
                 </a:solidFill>
                 <a:latin typeface="Amiri" pitchFamily="2" charset="-78"/>
+                <a:ea typeface="Amiri" pitchFamily="2" charset="-78"/>
                 <a:cs typeface="Amiri" pitchFamily="2" charset="-78"/>
               </a:rPr>
               <a:t>م</a:t>
@@ -18923,6 +19073,7 @@
                   <a:srgbClr val="8A6D1E"/>
                 </a:solidFill>
                 <a:latin typeface="Amiri" pitchFamily="2" charset="-78"/>
+                <a:ea typeface="Amiri" pitchFamily="2" charset="-78"/>
                 <a:cs typeface="Amiri" pitchFamily="2" charset="-78"/>
               </a:rPr>
               <a:t>الصِّحَّةُ وَالمُجْتَمَعُ</a:t>
@@ -19203,6 +19354,7 @@
                   <a:srgbClr val="1B3B6F"/>
                 </a:solidFill>
                 <a:latin typeface="Amiri" pitchFamily="2" charset="-78"/>
+                <a:ea typeface="Amiri" pitchFamily="2" charset="-78"/>
                 <a:cs typeface="Amiri" pitchFamily="2" charset="-78"/>
               </a:rPr>
               <a:t>فِي المَاضِي كَانَ … أَمَّا اليَوْمَ فَيَجْلِسُونَ …</a:t>
@@ -19279,6 +19431,7 @@
                   <a:srgbClr val="1B3B6F"/>
                 </a:solidFill>
                 <a:latin typeface="Amiri" pitchFamily="2" charset="-78"/>
+                <a:ea typeface="Amiri" pitchFamily="2" charset="-78"/>
                 <a:cs typeface="Amiri" pitchFamily="2" charset="-78"/>
               </a:rPr>
               <a:t>هَلِ الشَّبَابُ اليَوْمَ أَقَلُّ صِحَّةً مِنَ المَاضِي؟</a:t>
@@ -19382,6 +19535,7 @@
                   <a:srgbClr val="1B3B6F"/>
                 </a:solidFill>
                 <a:latin typeface="Amiri" pitchFamily="2" charset="-78"/>
+                <a:ea typeface="Amiri" pitchFamily="2" charset="-78"/>
                 <a:cs typeface="Amiri" pitchFamily="2" charset="-78"/>
               </a:rPr>
               <a:t>أَعْتَقِدُ أَنَّ أَهَمَّ عَادَةٍ … لِأَنَّ …</a:t>
@@ -19458,6 +19612,7 @@
                   <a:srgbClr val="1B3B6F"/>
                 </a:solidFill>
                 <a:latin typeface="Amiri" pitchFamily="2" charset="-78"/>
+                <a:ea typeface="Amiri" pitchFamily="2" charset="-78"/>
                 <a:cs typeface="Amiri" pitchFamily="2" charset="-78"/>
               </a:rPr>
               <a:t>مَا أَهَمُّ عَادَةٍ صِحِّيَّةٍ فِي رَأْيِكَ؟ لِمَاذَا؟</a:t>
@@ -19561,6 +19716,7 @@
                   <a:srgbClr val="1B3B6F"/>
                 </a:solidFill>
                 <a:latin typeface="Amiri" pitchFamily="2" charset="-78"/>
+                <a:ea typeface="Amiri" pitchFamily="2" charset="-78"/>
                 <a:cs typeface="Amiri" pitchFamily="2" charset="-78"/>
               </a:rPr>
               <a:t>كُنْتُ … فَقَرَّرْتُ أَنْ …</a:t>
@@ -19637,6 +19793,7 @@
                   <a:srgbClr val="1B3B6F"/>
                 </a:solidFill>
                 <a:latin typeface="Amiri" pitchFamily="2" charset="-78"/>
+                <a:ea typeface="Amiri" pitchFamily="2" charset="-78"/>
                 <a:cs typeface="Amiri" pitchFamily="2" charset="-78"/>
               </a:rPr>
               <a:t>كَيْفَ غَيَّرْتَ عَادَةً سَيِّئَةً عِنْدَكَ؟</a:t>
@@ -19740,6 +19897,7 @@
                   <a:srgbClr val="1B3B6F"/>
                 </a:solidFill>
                 <a:latin typeface="Amiri" pitchFamily="2" charset="-78"/>
+                <a:ea typeface="Amiri" pitchFamily="2" charset="-78"/>
                 <a:cs typeface="Amiri" pitchFamily="2" charset="-78"/>
               </a:rPr>
               <a:t>صَحِيحٌ أَنَّ … غَيْرَ أَنَّ …</a:t>
@@ -19816,6 +19974,7 @@
                   <a:srgbClr val="1B3B6F"/>
                 </a:solidFill>
                 <a:latin typeface="Amiri" pitchFamily="2" charset="-78"/>
+                <a:ea typeface="Amiri" pitchFamily="2" charset="-78"/>
                 <a:cs typeface="Amiri" pitchFamily="2" charset="-78"/>
               </a:rPr>
               <a:t>هَلْ يَجِبُ عَلَى المَدَارِسِ أَنْ تَمْنَعَ الوَجَبَاتِ السَّرِيعَةَ؟</a:t>
@@ -19919,6 +20078,7 @@
                   <a:srgbClr val="1B3B6F"/>
                 </a:solidFill>
                 <a:latin typeface="Amiri" pitchFamily="2" charset="-78"/>
+                <a:ea typeface="Amiri" pitchFamily="2" charset="-78"/>
                 <a:cs typeface="Amiri" pitchFamily="2" charset="-78"/>
               </a:rPr>
               <a:t>لَوْ كَانَ عِنْدِي شَهْرٌ، لَمَارَسْتُ …</a:t>
@@ -19995,6 +20155,7 @@
                   <a:srgbClr val="1B3B6F"/>
                 </a:solidFill>
                 <a:latin typeface="Amiri" pitchFamily="2" charset="-78"/>
+                <a:ea typeface="Amiri" pitchFamily="2" charset="-78"/>
                 <a:cs typeface="Amiri" pitchFamily="2" charset="-78"/>
               </a:rPr>
               <a:t>لَوْ كَانَ عِنْدَكَ شَهْرٌ لِتُحَسِّنَ صِحَّتَكَ، مَاذَا تَفْعَلُ؟</a:t>
@@ -20204,6 +20365,7 @@
                   <a:srgbClr val="D4AF37"/>
                 </a:solidFill>
                 <a:latin typeface="Amiri" pitchFamily="2" charset="-78"/>
+                <a:ea typeface="Amiri" pitchFamily="2" charset="-78"/>
                 <a:cs typeface="Amiri" pitchFamily="2" charset="-78"/>
               </a:rPr>
               <a:t>م</a:t>
@@ -20524,6 +20686,7 @@
                   <a:srgbClr val="8A6D1E"/>
                 </a:solidFill>
                 <a:latin typeface="Amiri" pitchFamily="2" charset="-78"/>
+                <a:ea typeface="Amiri" pitchFamily="2" charset="-78"/>
                 <a:cs typeface="Amiri" pitchFamily="2" charset="-78"/>
               </a:rPr>
               <a:t>آدَابُ الصَّفِّ</a:t>
@@ -22055,6 +22218,7 @@
                   <a:srgbClr val="D4AF37"/>
                 </a:solidFill>
                 <a:latin typeface="Amiri" pitchFamily="2" charset="-78"/>
+                <a:ea typeface="Amiri" pitchFamily="2" charset="-78"/>
                 <a:cs typeface="Amiri" pitchFamily="2" charset="-78"/>
               </a:rPr>
               <a:t>م</a:t>
@@ -22375,6 +22539,7 @@
                   <a:srgbClr val="8A6D1E"/>
                 </a:solidFill>
                 <a:latin typeface="Amiri" pitchFamily="2" charset="-78"/>
+                <a:ea typeface="Amiri" pitchFamily="2" charset="-78"/>
                 <a:cs typeface="Amiri" pitchFamily="2" charset="-78"/>
               </a:rPr>
               <a:t>نَمُوذَجُ الإِجَابَةِ</a:t>
@@ -22617,6 +22782,7 @@
                   <a:srgbClr val="1B3B6F"/>
                 </a:solidFill>
                 <a:latin typeface="Amiri" pitchFamily="2" charset="-78"/>
+                <a:ea typeface="Amiri" pitchFamily="2" charset="-78"/>
                 <a:cs typeface="Amiri" pitchFamily="2" charset="-78"/>
               </a:rPr>
               <a:t>نَعَمْ، آكُلُ الخُضَارَ وَالفَوَاكِهَ كُلَّ يَوْمٍ.</a:t>
@@ -22693,6 +22859,7 @@
                   <a:srgbClr val="1B3B6F"/>
                 </a:solidFill>
                 <a:latin typeface="Amiri" pitchFamily="2" charset="-78"/>
+                <a:ea typeface="Amiri" pitchFamily="2" charset="-78"/>
                 <a:cs typeface="Amiri" pitchFamily="2" charset="-78"/>
               </a:rPr>
               <a:t>هَلْ تَأْكُلُ طَعَامًا صِحِّيًّا؟</a:t>
@@ -22796,6 +22963,7 @@
                   <a:srgbClr val="1B3B6F"/>
                 </a:solidFill>
                 <a:latin typeface="Amiri" pitchFamily="2" charset="-78"/>
+                <a:ea typeface="Amiri" pitchFamily="2" charset="-78"/>
                 <a:cs typeface="Amiri" pitchFamily="2" charset="-78"/>
               </a:rPr>
               <a:t>أَنَامُ سَبْعَ سَاعَاتٍ تَقْرِيبًا.</a:t>
@@ -22872,6 +23040,7 @@
                   <a:srgbClr val="1B3B6F"/>
                 </a:solidFill>
                 <a:latin typeface="Amiri" pitchFamily="2" charset="-78"/>
+                <a:ea typeface="Amiri" pitchFamily="2" charset="-78"/>
                 <a:cs typeface="Amiri" pitchFamily="2" charset="-78"/>
               </a:rPr>
               <a:t>كَمْ سَاعَةً تَنَامُ؟</a:t>
@@ -22975,6 +23144,7 @@
                   <a:srgbClr val="1B3B6F"/>
                 </a:solidFill>
                 <a:latin typeface="Amiri" pitchFamily="2" charset="-78"/>
+                <a:ea typeface="Amiri" pitchFamily="2" charset="-78"/>
                 <a:cs typeface="Amiri" pitchFamily="2" charset="-78"/>
               </a:rPr>
               <a:t>رِيَاضَتِي المُفَضَّلَةُ هِيَ كُرَةُ السَّلَّةِ.</a:t>
@@ -23051,6 +23221,7 @@
                   <a:srgbClr val="1B3B6F"/>
                 </a:solidFill>
                 <a:latin typeface="Amiri" pitchFamily="2" charset="-78"/>
+                <a:ea typeface="Amiri" pitchFamily="2" charset="-78"/>
                 <a:cs typeface="Amiri" pitchFamily="2" charset="-78"/>
               </a:rPr>
               <a:t>مَا رِيَاضَتُكَ المُفَضَّلَةُ؟</a:t>
@@ -23154,6 +23325,7 @@
                   <a:srgbClr val="1B3B6F"/>
                 </a:solidFill>
                 <a:latin typeface="Amiri" pitchFamily="2" charset="-78"/>
+                <a:ea typeface="Amiri" pitchFamily="2" charset="-78"/>
                 <a:cs typeface="Amiri" pitchFamily="2" charset="-78"/>
               </a:rPr>
               <a:t>أَشْرَبُ المَاءَ عَادَةً، وَأَحْيَانًا العَصِيرَ.</a:t>
@@ -23230,6 +23402,7 @@
                   <a:srgbClr val="1B3B6F"/>
                 </a:solidFill>
                 <a:latin typeface="Amiri" pitchFamily="2" charset="-78"/>
+                <a:ea typeface="Amiri" pitchFamily="2" charset="-78"/>
                 <a:cs typeface="Amiri" pitchFamily="2" charset="-78"/>
               </a:rPr>
               <a:t>مَاذَا تَشْرَبُ عَادَةً؟</a:t>
@@ -23333,6 +23506,7 @@
                   <a:srgbClr val="1B3B6F"/>
                 </a:solidFill>
                 <a:latin typeface="Amiri" pitchFamily="2" charset="-78"/>
+                <a:ea typeface="Amiri" pitchFamily="2" charset="-78"/>
                 <a:cs typeface="Amiri" pitchFamily="2" charset="-78"/>
               </a:rPr>
               <a:t>نَعَمْ، أُحِبُّهَا، لٰكِنْ لَا آكُلُهَا كَثِيرًا.</a:t>
@@ -23409,6 +23583,7 @@
                   <a:srgbClr val="1B3B6F"/>
                 </a:solidFill>
                 <a:latin typeface="Amiri" pitchFamily="2" charset="-78"/>
+                <a:ea typeface="Amiri" pitchFamily="2" charset="-78"/>
                 <a:cs typeface="Amiri" pitchFamily="2" charset="-78"/>
               </a:rPr>
               <a:t>هَلْ تُحِبُّ الوَجَبَاتِ السَّرِيعَةَ؟</a:t>
@@ -23618,6 +23793,7 @@
                   <a:srgbClr val="D4AF37"/>
                 </a:solidFill>
                 <a:latin typeface="Amiri" pitchFamily="2" charset="-78"/>
+                <a:ea typeface="Amiri" pitchFamily="2" charset="-78"/>
                 <a:cs typeface="Amiri" pitchFamily="2" charset="-78"/>
               </a:rPr>
               <a:t>م</a:t>
@@ -23938,6 +24114,7 @@
                   <a:srgbClr val="8A6D1E"/>
                 </a:solidFill>
                 <a:latin typeface="Amiri" pitchFamily="2" charset="-78"/>
+                <a:ea typeface="Amiri" pitchFamily="2" charset="-78"/>
                 <a:cs typeface="Amiri" pitchFamily="2" charset="-78"/>
               </a:rPr>
               <a:t>نَمُوذَجُ الإِجَابَةِ</a:t>
@@ -24180,6 +24357,7 @@
                   <a:srgbClr val="1B3B6F"/>
                 </a:solidFill>
                 <a:latin typeface="Amiri" pitchFamily="2" charset="-78"/>
+                <a:ea typeface="Amiri" pitchFamily="2" charset="-78"/>
                 <a:cs typeface="Amiri" pitchFamily="2" charset="-78"/>
               </a:rPr>
               <a:t>أَسْتَيْقِظُ مُبَكِّرًا وَآكُلُ فُطُورًا صِحِّيًّا، ثُمَّ أَمْشِي إِلَى المَدْرَسَةِ، وَفِي المَسَاءِ أُمَارِسُ السِّبَاحَةَ.</a:t>
@@ -24256,6 +24434,7 @@
                   <a:srgbClr val="1B3B6F"/>
                 </a:solidFill>
                 <a:latin typeface="Amiri" pitchFamily="2" charset="-78"/>
+                <a:ea typeface="Amiri" pitchFamily="2" charset="-78"/>
                 <a:cs typeface="Amiri" pitchFamily="2" charset="-78"/>
               </a:rPr>
               <a:t>صِفْ يَوْمًا صِحِّيًّا فِي حَيَاتِكَ.</a:t>
@@ -24359,6 +24538,7 @@
                   <a:srgbClr val="1B3B6F"/>
                 </a:solidFill>
                 <a:latin typeface="Amiri" pitchFamily="2" charset="-78"/>
+                <a:ea typeface="Amiri" pitchFamily="2" charset="-78"/>
                 <a:cs typeface="Amiri" pitchFamily="2" charset="-78"/>
               </a:rPr>
               <a:t>أَحْيَانًا أَسْهَرُ عَلَى الهَاتِفِ، لٰكِنِّي أُحَاوِلُ أَنْ أَنَامَ مُبَكِّرًا.</a:t>
@@ -24435,6 +24615,7 @@
                   <a:srgbClr val="1B3B6F"/>
                 </a:solidFill>
                 <a:latin typeface="Amiri" pitchFamily="2" charset="-78"/>
+                <a:ea typeface="Amiri" pitchFamily="2" charset="-78"/>
                 <a:cs typeface="Amiri" pitchFamily="2" charset="-78"/>
               </a:rPr>
               <a:t>مَا العَادَةُ غَيْرُ الصِّحِّيَّةِ الَّتِي عِنْدَكَ؟</a:t>
@@ -24538,6 +24719,7 @@
                   <a:srgbClr val="1B3B6F"/>
                 </a:solidFill>
                 <a:latin typeface="Amiri" pitchFamily="2" charset="-78"/>
+                <a:ea typeface="Amiri" pitchFamily="2" charset="-78"/>
                 <a:cs typeface="Amiri" pitchFamily="2" charset="-78"/>
               </a:rPr>
               <a:t>يَجِبُ أَنْ يَأْكُلَ الفُطُورَ، لِأَنَّهُ يُعْطِيهِ الطَّاقَةَ لِلتَّرْكِيزِ فِي الصَّفِّ.</a:t>
@@ -24614,6 +24796,7 @@
                   <a:srgbClr val="1B3B6F"/>
                 </a:solidFill>
                 <a:latin typeface="Amiri" pitchFamily="2" charset="-78"/>
+                <a:ea typeface="Amiri" pitchFamily="2" charset="-78"/>
                 <a:cs typeface="Amiri" pitchFamily="2" charset="-78"/>
               </a:rPr>
               <a:t>مَا نَصِيحَتُكَ لِطَالِبٍ لَا يَأْكُلُ الفُطُورَ؟</a:t>
@@ -24717,6 +24900,7 @@
                   <a:srgbClr val="1B3B6F"/>
                 </a:solidFill>
                 <a:latin typeface="Amiri" pitchFamily="2" charset="-78"/>
+                <a:ea typeface="Amiri" pitchFamily="2" charset="-78"/>
                 <a:cs typeface="Amiri" pitchFamily="2" charset="-78"/>
               </a:rPr>
               <a:t>نَعَمْ، نَمْشِي مَعًا فِي الحَدِيقَةِ يَوْمَ الأَحَدِ، وَأَحْيَانًا نَرْكَبُ الدَّرَّاجَاتِ.</a:t>
@@ -24793,6 +24977,7 @@
                   <a:srgbClr val="1B3B6F"/>
                 </a:solidFill>
                 <a:latin typeface="Amiri" pitchFamily="2" charset="-78"/>
+                <a:ea typeface="Amiri" pitchFamily="2" charset="-78"/>
                 <a:cs typeface="Amiri" pitchFamily="2" charset="-78"/>
               </a:rPr>
               <a:t>هَلْ تُمَارِسُ الرِّيَاضَةَ مَعَ أُسْرَتِكَ؟</a:t>
@@ -24896,6 +25081,7 @@
                   <a:srgbClr val="1B3B6F"/>
                 </a:solidFill>
                 <a:latin typeface="Amiri" pitchFamily="2" charset="-78"/>
+                <a:ea typeface="Amiri" pitchFamily="2" charset="-78"/>
                 <a:cs typeface="Amiri" pitchFamily="2" charset="-78"/>
               </a:rPr>
               <a:t>أَمْسِ أَكَلْتُ سَمَكًا مَعَ الخُضَارِ، وَكَانَ صِحِّيًّا وَلَذِيذًا.</a:t>
@@ -24972,6 +25158,7 @@
                   <a:srgbClr val="1B3B6F"/>
                 </a:solidFill>
                 <a:latin typeface="Amiri" pitchFamily="2" charset="-78"/>
+                <a:ea typeface="Amiri" pitchFamily="2" charset="-78"/>
                 <a:cs typeface="Amiri" pitchFamily="2" charset="-78"/>
               </a:rPr>
               <a:t>مَاذَا أَكَلْتَ أَمْسِ؟ هَلْ كَانَ صِحِّيًّا؟</a:t>
@@ -25181,6 +25368,7 @@
                   <a:srgbClr val="D4AF37"/>
                 </a:solidFill>
                 <a:latin typeface="Amiri" pitchFamily="2" charset="-78"/>
+                <a:ea typeface="Amiri" pitchFamily="2" charset="-78"/>
                 <a:cs typeface="Amiri" pitchFamily="2" charset="-78"/>
               </a:rPr>
               <a:t>م</a:t>
@@ -25501,6 +25689,7 @@
                   <a:srgbClr val="8A6D1E"/>
                 </a:solidFill>
                 <a:latin typeface="Amiri" pitchFamily="2" charset="-78"/>
+                <a:ea typeface="Amiri" pitchFamily="2" charset="-78"/>
                 <a:cs typeface="Amiri" pitchFamily="2" charset="-78"/>
               </a:rPr>
               <a:t>نَمُوذَجُ الإِجَابَةِ</a:t>
@@ -25743,6 +25932,7 @@
                   <a:srgbClr val="1B3B6F"/>
                 </a:solidFill>
                 <a:latin typeface="Amiri" pitchFamily="2" charset="-78"/>
+                <a:ea typeface="Amiri" pitchFamily="2" charset="-78"/>
                 <a:cs typeface="Amiri" pitchFamily="2" charset="-78"/>
               </a:rPr>
               <a:t>فِي المَاضِي كَانَ الشَّبَابُ يَلْعَبُونَ فِي الخَارِجِ أَكْثَرَ، أَمَّا اليَوْمَ فَيَجْلِسُونَ أَمَامَ الشَّاشَاتِ سَاعَاتٍ طَوِيلَةً.</a:t>
@@ -25819,6 +26009,7 @@
                   <a:srgbClr val="1B3B6F"/>
                 </a:solidFill>
                 <a:latin typeface="Amiri" pitchFamily="2" charset="-78"/>
+                <a:ea typeface="Amiri" pitchFamily="2" charset="-78"/>
                 <a:cs typeface="Amiri" pitchFamily="2" charset="-78"/>
               </a:rPr>
               <a:t>هَلِ الشَّبَابُ اليَوْمَ أَقَلُّ صِحَّةً مِنَ المَاضِي؟</a:t>
@@ -25922,6 +26113,7 @@
                   <a:srgbClr val="1B3B6F"/>
                 </a:solidFill>
                 <a:latin typeface="Amiri" pitchFamily="2" charset="-78"/>
+                <a:ea typeface="Amiri" pitchFamily="2" charset="-78"/>
                 <a:cs typeface="Amiri" pitchFamily="2" charset="-78"/>
               </a:rPr>
               <a:t>أَعْتَقِدُ أَنَّ أَهَمَّ عَادَةٍ هِيَ النَّوْمُ الكَافِي، لِأَنَّهُ يُؤَثِّرُ فِي التَّرْكِيزِ وَالمِزَاجِ وَالصِّحَّةِ كُلِّهَا.</a:t>
@@ -25998,6 +26190,7 @@
                   <a:srgbClr val="1B3B6F"/>
                 </a:solidFill>
                 <a:latin typeface="Amiri" pitchFamily="2" charset="-78"/>
+                <a:ea typeface="Amiri" pitchFamily="2" charset="-78"/>
                 <a:cs typeface="Amiri" pitchFamily="2" charset="-78"/>
               </a:rPr>
               <a:t>مَا أَهَمُّ عَادَةٍ صِحِّيَّةٍ فِي رَأْيِكَ؟ لِمَاذَا؟</a:t>
@@ -26101,6 +26294,7 @@
                   <a:srgbClr val="1B3B6F"/>
                 </a:solidFill>
                 <a:latin typeface="Amiri" pitchFamily="2" charset="-78"/>
+                <a:ea typeface="Amiri" pitchFamily="2" charset="-78"/>
                 <a:cs typeface="Amiri" pitchFamily="2" charset="-78"/>
               </a:rPr>
               <a:t>كُنْتُ أَشْرَبُ المَشْرُوبَاتِ الغَازِيَّةَ كُلَّ يَوْمٍ، فَقَرَّرْتُ أَنْ أَشْرَبَ المَاءَ بَدَلًا مِنْهَا، وَالآنَ أَشْعُرُ بِنَشَاطٍ أَكْبَرَ.</a:t>
@@ -26177,6 +26371,7 @@
                   <a:srgbClr val="1B3B6F"/>
                 </a:solidFill>
                 <a:latin typeface="Amiri" pitchFamily="2" charset="-78"/>
+                <a:ea typeface="Amiri" pitchFamily="2" charset="-78"/>
                 <a:cs typeface="Amiri" pitchFamily="2" charset="-78"/>
               </a:rPr>
               <a:t>كَيْفَ غَيَّرْتَ عَادَةً سَيِّئَةً عِنْدَكَ؟</a:t>
@@ -26386,6 +26581,7 @@
                   <a:srgbClr val="D4AF37"/>
                 </a:solidFill>
                 <a:latin typeface="Amiri" pitchFamily="2" charset="-78"/>
+                <a:ea typeface="Amiri" pitchFamily="2" charset="-78"/>
                 <a:cs typeface="Amiri" pitchFamily="2" charset="-78"/>
               </a:rPr>
               <a:t>م</a:t>
@@ -26706,6 +26902,7 @@
                   <a:srgbClr val="8A6D1E"/>
                 </a:solidFill>
                 <a:latin typeface="Amiri" pitchFamily="2" charset="-78"/>
+                <a:ea typeface="Amiri" pitchFamily="2" charset="-78"/>
                 <a:cs typeface="Amiri" pitchFamily="2" charset="-78"/>
               </a:rPr>
               <a:t>نَمُوذَجُ الإِجَابَةِ</a:t>
@@ -26948,6 +27145,7 @@
                   <a:srgbClr val="1B3B6F"/>
                 </a:solidFill>
                 <a:latin typeface="Amiri" pitchFamily="2" charset="-78"/>
+                <a:ea typeface="Amiri" pitchFamily="2" charset="-78"/>
                 <a:cs typeface="Amiri" pitchFamily="2" charset="-78"/>
               </a:rPr>
               <a:t>صَحِيحٌ أَنَّ المَنْعَ يَحْمِي الطُّلَّابَ، غَيْرَ أَنَّ التَّوْعِيَةَ أَفْضَلُ، لِأَنَّ الطَّالِبَ يَجِبُ أَنْ يَخْتَارَ بِنَفْسِهِ.</a:t>
@@ -27027,6 +27225,7 @@
                   <a:srgbClr val="1B3B6F"/>
                 </a:solidFill>
                 <a:latin typeface="Amiri" pitchFamily="2" charset="-78"/>
+                <a:ea typeface="Amiri" pitchFamily="2" charset="-78"/>
                 <a:cs typeface="Amiri" pitchFamily="2" charset="-78"/>
               </a:rPr>
               <a:t>هَلْ يَجِبُ عَلَى المَدَارِسِ أَنْ تَمْنَعَ الوَجَبَاتِ السَّرِيعَةَ؟</a:t>
@@ -27130,6 +27329,7 @@
                   <a:srgbClr val="1B3B6F"/>
                 </a:solidFill>
                 <a:latin typeface="Amiri" pitchFamily="2" charset="-78"/>
+                <a:ea typeface="Amiri" pitchFamily="2" charset="-78"/>
                 <a:cs typeface="Amiri" pitchFamily="2" charset="-78"/>
               </a:rPr>
               <a:t>لَوْ كَانَ عِنْدِي شَهْرٌ، لَمَارَسْتُ الرِّيَاضَةَ كُلَّ صَبَاحٍ، وَلَتَعَلَّمْتُ طَبْخَ وَجَبَاتٍ صِحِّيَّةٍ.</a:t>
@@ -27206,6 +27406,7 @@
                   <a:srgbClr val="1B3B6F"/>
                 </a:solidFill>
                 <a:latin typeface="Amiri" pitchFamily="2" charset="-78"/>
+                <a:ea typeface="Amiri" pitchFamily="2" charset="-78"/>
                 <a:cs typeface="Amiri" pitchFamily="2" charset="-78"/>
               </a:rPr>
               <a:t>لَوْ كَانَ عِنْدَكَ شَهْرٌ لِتُحَسِّنَ صِحَّتَكَ، مَاذَا تَفْعَلُ؟</a:t>
@@ -27415,6 +27616,7 @@
                   <a:srgbClr val="D4AF37"/>
                 </a:solidFill>
                 <a:latin typeface="Amiri" pitchFamily="2" charset="-78"/>
+                <a:ea typeface="Amiri" pitchFamily="2" charset="-78"/>
                 <a:cs typeface="Amiri" pitchFamily="2" charset="-78"/>
               </a:rPr>
               <a:t>م</a:t>
@@ -27735,6 +27937,7 @@
                   <a:srgbClr val="8A6D1E"/>
                 </a:solidFill>
                 <a:latin typeface="Amiri" pitchFamily="2" charset="-78"/>
+                <a:ea typeface="Amiri" pitchFamily="2" charset="-78"/>
                 <a:cs typeface="Amiri" pitchFamily="2" charset="-78"/>
               </a:rPr>
               <a:t>قَيِّمْ عَمَلَكَ</a:t>
@@ -28979,6 +29182,7 @@
                   <a:srgbClr val="FFFFFF"/>
                 </a:solidFill>
                 <a:latin typeface="Amiri" pitchFamily="2" charset="-78"/>
+                <a:ea typeface="Amiri" pitchFamily="2" charset="-78"/>
                 <a:cs typeface="Amiri" pitchFamily="2" charset="-78"/>
               </a:rPr>
               <a:t>أَحْسَنْتُمْ! إِلَى اللِّقَاءِ</a:t>
@@ -29131,6 +29335,7 @@
                   <a:srgbClr val="D4AF37"/>
                 </a:solidFill>
                 <a:latin typeface="Amiri" pitchFamily="2" charset="-78"/>
+                <a:ea typeface="Amiri" pitchFamily="2" charset="-78"/>
                 <a:cs typeface="Amiri" pitchFamily="2" charset="-78"/>
               </a:rPr>
               <a:t>وَرْشَةُ الكِتَابَةِ</a:t>
@@ -29264,6 +29469,7 @@
                   <a:srgbClr val="D4AF37"/>
                 </a:solidFill>
                 <a:latin typeface="Amiri" pitchFamily="2" charset="-78"/>
+                <a:ea typeface="Amiri" pitchFamily="2" charset="-78"/>
                 <a:cs typeface="Amiri" pitchFamily="2" charset="-78"/>
               </a:rPr>
               <a:t>م</a:t>
@@ -29584,6 +29790,7 @@
                   <a:srgbClr val="8A6D1E"/>
                 </a:solidFill>
                 <a:latin typeface="Amiri" pitchFamily="2" charset="-78"/>
+                <a:ea typeface="Amiri" pitchFamily="2" charset="-78"/>
                 <a:cs typeface="Amiri" pitchFamily="2" charset="-78"/>
               </a:rPr>
               <a:t>خَرِيطَةُ الوَرْشَةِ</a:t>
@@ -29898,6 +30105,7 @@
                   <a:srgbClr val="1B3B6F"/>
                 </a:solidFill>
                 <a:latin typeface="Amiri" pitchFamily="2" charset="-78"/>
+                <a:ea typeface="Amiri" pitchFamily="2" charset="-78"/>
                 <a:cs typeface="Amiri" pitchFamily="2" charset="-78"/>
               </a:rPr>
               <a:t>كَيْفَ</a:t>
@@ -30174,6 +30382,7 @@
                   <a:srgbClr val="1E6B52"/>
                 </a:solidFill>
                 <a:latin typeface="Amiri" pitchFamily="2" charset="-78"/>
+                <a:ea typeface="Amiri" pitchFamily="2" charset="-78"/>
                 <a:cs typeface="Amiri" pitchFamily="2" charset="-78"/>
               </a:rPr>
               <a:t>تَمْثِيلُ الدَّوْرِ</a:t>
@@ -30450,6 +30659,7 @@
                   <a:srgbClr val="8A6D1E"/>
                 </a:solidFill>
                 <a:latin typeface="Amiri" pitchFamily="2" charset="-78"/>
+                <a:ea typeface="Amiri" pitchFamily="2" charset="-78"/>
                 <a:cs typeface="Amiri" pitchFamily="2" charset="-78"/>
               </a:rPr>
               <a:t>النَّمُوذَجُ</a:t>
@@ -30726,6 +30936,7 @@
                   <a:srgbClr val="1E6B52"/>
                 </a:solidFill>
                 <a:latin typeface="Amiri" pitchFamily="2" charset="-78"/>
+                <a:ea typeface="Amiri" pitchFamily="2" charset="-78"/>
                 <a:cs typeface="Amiri" pitchFamily="2" charset="-78"/>
               </a:rPr>
               <a:t>المُحَادَثَةُ</a:t>
@@ -31002,6 +31213,7 @@
                   <a:srgbClr val="8A6D1E"/>
                 </a:solidFill>
                 <a:latin typeface="Amiri" pitchFamily="2" charset="-78"/>
+                <a:ea typeface="Amiri" pitchFamily="2" charset="-78"/>
                 <a:cs typeface="Amiri" pitchFamily="2" charset="-78"/>
               </a:rPr>
               <a:t>قَيِّمْ</a:t>
@@ -31245,6 +31457,7 @@
                   <a:srgbClr val="D4AF37"/>
                 </a:solidFill>
                 <a:latin typeface="Amiri" pitchFamily="2" charset="-78"/>
+                <a:ea typeface="Amiri" pitchFamily="2" charset="-78"/>
                 <a:cs typeface="Amiri" pitchFamily="2" charset="-78"/>
               </a:rPr>
               <a:t>م</a:t>
@@ -31565,6 +31778,7 @@
                   <a:srgbClr val="8A6D1E"/>
                 </a:solidFill>
                 <a:latin typeface="Amiri" pitchFamily="2" charset="-78"/>
+                <a:ea typeface="Amiri" pitchFamily="2" charset="-78"/>
                 <a:cs typeface="Amiri" pitchFamily="2" charset="-78"/>
               </a:rPr>
               <a:t>امْتِحَانُ التَّحَدُّثِ</a:t>
@@ -32189,6 +32403,7 @@
                   <a:srgbClr val="1B3B6F"/>
                 </a:solidFill>
                 <a:latin typeface="Amiri" pitchFamily="2" charset="-78"/>
+                <a:ea typeface="Amiri" pitchFamily="2" charset="-78"/>
                 <a:cs typeface="Amiri" pitchFamily="2" charset="-78"/>
               </a:rPr>
               <a:t>عَفْوًا، هَلْ يُمْكِنُ أَنْ تُعِيدَ السُّؤَالَ؟</a:t>
@@ -32288,6 +32503,7 @@
                   <a:srgbClr val="1B3B6F"/>
                 </a:solidFill>
                 <a:latin typeface="Amiri" pitchFamily="2" charset="-78"/>
+                <a:ea typeface="Amiri" pitchFamily="2" charset="-78"/>
                 <a:cs typeface="Amiri" pitchFamily="2" charset="-78"/>
               </a:rPr>
               <a:t>لَحْظَةً، دَعْنِي أُفَكِّرُ …</a:t>
@@ -32387,6 +32603,7 @@
                   <a:srgbClr val="1B3B6F"/>
                 </a:solidFill>
                 <a:latin typeface="Amiri" pitchFamily="2" charset="-78"/>
+                <a:ea typeface="Amiri" pitchFamily="2" charset="-78"/>
                 <a:cs typeface="Amiri" pitchFamily="2" charset="-78"/>
               </a:rPr>
               <a:t>أَقْصِدُ …</a:t>
@@ -32558,6 +32775,7 @@
                   <a:srgbClr val="D4AF37"/>
                 </a:solidFill>
                 <a:latin typeface="Amiri" pitchFamily="2" charset="-78"/>
+                <a:ea typeface="Amiri" pitchFamily="2" charset="-78"/>
                 <a:cs typeface="Amiri" pitchFamily="2" charset="-78"/>
               </a:rPr>
               <a:t>م</a:t>
@@ -32878,6 +33096,7 @@
                   <a:srgbClr val="8A6D1E"/>
                 </a:solidFill>
                 <a:latin typeface="Amiri" pitchFamily="2" charset="-78"/>
+                <a:ea typeface="Amiri" pitchFamily="2" charset="-78"/>
                 <a:cs typeface="Amiri" pitchFamily="2" charset="-78"/>
               </a:rPr>
               <a:t>العَادَاتُ الصِّحِّيَّةُ</a:t>
@@ -33181,6 +33400,7 @@
                   <a:srgbClr val="1B3B6F"/>
                 </a:solidFill>
                 <a:latin typeface="Amiri" pitchFamily="2" charset="-78"/>
+                <a:ea typeface="Amiri" pitchFamily="2" charset="-78"/>
                 <a:cs typeface="Amiri" pitchFamily="2" charset="-78"/>
               </a:rPr>
               <a:t>أُمَارِسُ الرِّيَاضَةَ</a:t>
@@ -33338,6 +33558,7 @@
                   <a:srgbClr val="1B3B6F"/>
                 </a:solidFill>
                 <a:latin typeface="Amiri" pitchFamily="2" charset="-78"/>
+                <a:ea typeface="Amiri" pitchFamily="2" charset="-78"/>
                 <a:cs typeface="Amiri" pitchFamily="2" charset="-78"/>
               </a:rPr>
               <a:t>يُمَارِسُونَ</a:t>
@@ -33441,6 +33662,7 @@
                   <a:srgbClr val="1B3B6F"/>
                 </a:solidFill>
                 <a:latin typeface="Amiri" pitchFamily="2" charset="-78"/>
+                <a:ea typeface="Amiri" pitchFamily="2" charset="-78"/>
                 <a:cs typeface="Amiri" pitchFamily="2" charset="-78"/>
               </a:rPr>
               <a:t>تُمَارِسُ</a:t>
@@ -33544,6 +33766,7 @@
                   <a:srgbClr val="1B3B6F"/>
                 </a:solidFill>
                 <a:latin typeface="Amiri" pitchFamily="2" charset="-78"/>
+                <a:ea typeface="Amiri" pitchFamily="2" charset="-78"/>
                 <a:cs typeface="Amiri" pitchFamily="2" charset="-78"/>
               </a:rPr>
               <a:t>يُمَارِسُ</a:t>
@@ -33809,6 +34032,7 @@
                   <a:srgbClr val="1B3B6F"/>
                 </a:solidFill>
                 <a:latin typeface="Amiri" pitchFamily="2" charset="-78"/>
+                <a:ea typeface="Amiri" pitchFamily="2" charset="-78"/>
                 <a:cs typeface="Amiri" pitchFamily="2" charset="-78"/>
               </a:rPr>
               <a:t>أَنَامُ</a:t>
@@ -33966,6 +34190,7 @@
                   <a:srgbClr val="1B3B6F"/>
                 </a:solidFill>
                 <a:latin typeface="Amiri" pitchFamily="2" charset="-78"/>
+                <a:ea typeface="Amiri" pitchFamily="2" charset="-78"/>
                 <a:cs typeface="Amiri" pitchFamily="2" charset="-78"/>
               </a:rPr>
               <a:t>يَنَامُونَ</a:t>
@@ -34069,6 +34294,7 @@
                   <a:srgbClr val="1B3B6F"/>
                 </a:solidFill>
                 <a:latin typeface="Amiri" pitchFamily="2" charset="-78"/>
+                <a:ea typeface="Amiri" pitchFamily="2" charset="-78"/>
                 <a:cs typeface="Amiri" pitchFamily="2" charset="-78"/>
               </a:rPr>
               <a:t>تَنَامُ</a:t>
@@ -34172,6 +34398,7 @@
                   <a:srgbClr val="1B3B6F"/>
                 </a:solidFill>
                 <a:latin typeface="Amiri" pitchFamily="2" charset="-78"/>
+                <a:ea typeface="Amiri" pitchFamily="2" charset="-78"/>
                 <a:cs typeface="Amiri" pitchFamily="2" charset="-78"/>
               </a:rPr>
               <a:t>يَنَامُ</a:t>
@@ -34437,6 +34664,7 @@
                   <a:srgbClr val="1B3B6F"/>
                 </a:solidFill>
                 <a:latin typeface="Amiri" pitchFamily="2" charset="-78"/>
+                <a:ea typeface="Amiri" pitchFamily="2" charset="-78"/>
                 <a:cs typeface="Amiri" pitchFamily="2" charset="-78"/>
               </a:rPr>
               <a:t>أُحَافِظُ عَلَى</a:t>
@@ -34594,6 +34822,7 @@
                   <a:srgbClr val="1B3B6F"/>
                 </a:solidFill>
                 <a:latin typeface="Amiri" pitchFamily="2" charset="-78"/>
+                <a:ea typeface="Amiri" pitchFamily="2" charset="-78"/>
                 <a:cs typeface="Amiri" pitchFamily="2" charset="-78"/>
               </a:rPr>
               <a:t>يُحَافِظُونَ</a:t>
@@ -34697,6 +34926,7 @@
                   <a:srgbClr val="1B3B6F"/>
                 </a:solidFill>
                 <a:latin typeface="Amiri" pitchFamily="2" charset="-78"/>
+                <a:ea typeface="Amiri" pitchFamily="2" charset="-78"/>
                 <a:cs typeface="Amiri" pitchFamily="2" charset="-78"/>
               </a:rPr>
               <a:t>تُحَافِظُ</a:t>
@@ -34800,6 +35030,7 @@
                   <a:srgbClr val="1B3B6F"/>
                 </a:solidFill>
                 <a:latin typeface="Amiri" pitchFamily="2" charset="-78"/>
+                <a:ea typeface="Amiri" pitchFamily="2" charset="-78"/>
                 <a:cs typeface="Amiri" pitchFamily="2" charset="-78"/>
               </a:rPr>
               <a:t>يُحَافِظُ</a:t>
@@ -35065,6 +35296,7 @@
                   <a:srgbClr val="1B3B6F"/>
                 </a:solidFill>
                 <a:latin typeface="Amiri" pitchFamily="2" charset="-78"/>
+                <a:ea typeface="Amiri" pitchFamily="2" charset="-78"/>
                 <a:cs typeface="Amiri" pitchFamily="2" charset="-78"/>
               </a:rPr>
               <a:t>أَتَجَنَّبُ</a:t>
@@ -35222,6 +35454,7 @@
                   <a:srgbClr val="1B3B6F"/>
                 </a:solidFill>
                 <a:latin typeface="Amiri" pitchFamily="2" charset="-78"/>
+                <a:ea typeface="Amiri" pitchFamily="2" charset="-78"/>
                 <a:cs typeface="Amiri" pitchFamily="2" charset="-78"/>
               </a:rPr>
               <a:t>يَتَجَنَّبُونَ</a:t>
@@ -35325,6 +35558,7 @@
                   <a:srgbClr val="1B3B6F"/>
                 </a:solidFill>
                 <a:latin typeface="Amiri" pitchFamily="2" charset="-78"/>
+                <a:ea typeface="Amiri" pitchFamily="2" charset="-78"/>
                 <a:cs typeface="Amiri" pitchFamily="2" charset="-78"/>
               </a:rPr>
               <a:t>تَتَجَنَّبُ</a:t>
@@ -35428,6 +35662,7 @@
                   <a:srgbClr val="1B3B6F"/>
                 </a:solidFill>
                 <a:latin typeface="Amiri" pitchFamily="2" charset="-78"/>
+                <a:ea typeface="Amiri" pitchFamily="2" charset="-78"/>
                 <a:cs typeface="Amiri" pitchFamily="2" charset="-78"/>
               </a:rPr>
               <a:t>يَتَجَنَّبُ</a:t>
@@ -35693,6 +35928,7 @@
                   <a:srgbClr val="1B3B6F"/>
                 </a:solidFill>
                 <a:latin typeface="Amiri" pitchFamily="2" charset="-78"/>
+                <a:ea typeface="Amiri" pitchFamily="2" charset="-78"/>
                 <a:cs typeface="Amiri" pitchFamily="2" charset="-78"/>
               </a:rPr>
               <a:t>يَجِبُ أَنْ …</a:t>
@@ -36012,6 +36248,7 @@
                   <a:srgbClr val="1B3B6F"/>
                 </a:solidFill>
                 <a:latin typeface="Amiri" pitchFamily="2" charset="-78"/>
+                <a:ea typeface="Amiri" pitchFamily="2" charset="-78"/>
                 <a:cs typeface="Amiri" pitchFamily="2" charset="-78"/>
               </a:rPr>
               <a:t>يَنْبَغِي أَنْ …</a:t>
@@ -36199,6 +36436,7 @@
                   <a:srgbClr val="D4AF37"/>
                 </a:solidFill>
                 <a:latin typeface="Amiri" pitchFamily="2" charset="-78"/>
+                <a:ea typeface="Amiri" pitchFamily="2" charset="-78"/>
                 <a:cs typeface="Amiri" pitchFamily="2" charset="-78"/>
               </a:rPr>
               <a:t>م</a:t>
@@ -36519,6 +36757,7 @@
                   <a:srgbClr val="8A6D1E"/>
                 </a:solidFill>
                 <a:latin typeface="Amiri" pitchFamily="2" charset="-78"/>
+                <a:ea typeface="Amiri" pitchFamily="2" charset="-78"/>
                 <a:cs typeface="Amiri" pitchFamily="2" charset="-78"/>
               </a:rPr>
               <a:t>التَّغْذِيَةُ</a:t>
@@ -36822,6 +37061,7 @@
                   <a:srgbClr val="1B3B6F"/>
                 </a:solidFill>
                 <a:latin typeface="Amiri" pitchFamily="2" charset="-78"/>
+                <a:ea typeface="Amiri" pitchFamily="2" charset="-78"/>
                 <a:cs typeface="Amiri" pitchFamily="2" charset="-78"/>
               </a:rPr>
               <a:t>صِحِّيٌّ</a:t>
@@ -36979,6 +37219,7 @@
                   <a:srgbClr val="1B3B6F"/>
                 </a:solidFill>
                 <a:latin typeface="Amiri" pitchFamily="2" charset="-78"/>
+                <a:ea typeface="Amiri" pitchFamily="2" charset="-78"/>
                 <a:cs typeface="Amiri" pitchFamily="2" charset="-78"/>
               </a:rPr>
               <a:t>صِحِّيَّةٌ</a:t>
@@ -37082,6 +37323,7 @@
                   <a:srgbClr val="1B3B6F"/>
                 </a:solidFill>
                 <a:latin typeface="Amiri" pitchFamily="2" charset="-78"/>
+                <a:ea typeface="Amiri" pitchFamily="2" charset="-78"/>
                 <a:cs typeface="Amiri" pitchFamily="2" charset="-78"/>
               </a:rPr>
               <a:t>صِحِّيَّةٌ</a:t>
@@ -37185,6 +37427,7 @@
                   <a:srgbClr val="1B3B6F"/>
                 </a:solidFill>
                 <a:latin typeface="Amiri" pitchFamily="2" charset="-78"/>
+                <a:ea typeface="Amiri" pitchFamily="2" charset="-78"/>
                 <a:cs typeface="Amiri" pitchFamily="2" charset="-78"/>
               </a:rPr>
               <a:t>صِحِّيٌّ</a:t>
@@ -37450,6 +37693,7 @@
                   <a:srgbClr val="1B3B6F"/>
                 </a:solidFill>
                 <a:latin typeface="Amiri" pitchFamily="2" charset="-78"/>
+                <a:ea typeface="Amiri" pitchFamily="2" charset="-78"/>
                 <a:cs typeface="Amiri" pitchFamily="2" charset="-78"/>
               </a:rPr>
               <a:t>نَشِيطٌ</a:t>
@@ -37607,6 +37851,7 @@
                   <a:srgbClr val="1B3B6F"/>
                 </a:solidFill>
                 <a:latin typeface="Amiri" pitchFamily="2" charset="-78"/>
+                <a:ea typeface="Amiri" pitchFamily="2" charset="-78"/>
                 <a:cs typeface="Amiri" pitchFamily="2" charset="-78"/>
               </a:rPr>
               <a:t>نَشِيطُونَ</a:t>
@@ -37710,6 +37955,7 @@
                   <a:srgbClr val="1B3B6F"/>
                 </a:solidFill>
                 <a:latin typeface="Amiri" pitchFamily="2" charset="-78"/>
+                <a:ea typeface="Amiri" pitchFamily="2" charset="-78"/>
                 <a:cs typeface="Amiri" pitchFamily="2" charset="-78"/>
               </a:rPr>
               <a:t>نَشِيطَةٌ</a:t>
@@ -37813,6 +38059,7 @@
                   <a:srgbClr val="1B3B6F"/>
                 </a:solidFill>
                 <a:latin typeface="Amiri" pitchFamily="2" charset="-78"/>
+                <a:ea typeface="Amiri" pitchFamily="2" charset="-78"/>
                 <a:cs typeface="Amiri" pitchFamily="2" charset="-78"/>
               </a:rPr>
               <a:t>نَشِيطٌ</a:t>
@@ -38078,6 +38325,7 @@
                   <a:srgbClr val="1B3B6F"/>
                 </a:solidFill>
                 <a:latin typeface="Amiri" pitchFamily="2" charset="-78"/>
+                <a:ea typeface="Amiri" pitchFamily="2" charset="-78"/>
                 <a:cs typeface="Amiri" pitchFamily="2" charset="-78"/>
               </a:rPr>
               <a:t>خُضَارٌ وَفَوَاكِهُ</a:t>
@@ -38397,6 +38645,7 @@
                   <a:srgbClr val="1B3B6F"/>
                 </a:solidFill>
                 <a:latin typeface="Amiri" pitchFamily="2" charset="-78"/>
+                <a:ea typeface="Amiri" pitchFamily="2" charset="-78"/>
                 <a:cs typeface="Amiri" pitchFamily="2" charset="-78"/>
               </a:rPr>
               <a:t>السُّكَّرُ · الدُّهُونُ</a:t>
@@ -38716,6 +38965,7 @@
                   <a:srgbClr val="1B3B6F"/>
                 </a:solidFill>
                 <a:latin typeface="Amiri" pitchFamily="2" charset="-78"/>
+                <a:ea typeface="Amiri" pitchFamily="2" charset="-78"/>
                 <a:cs typeface="Amiri" pitchFamily="2" charset="-78"/>
               </a:rPr>
               <a:t>عَادَةٌ</a:t>
@@ -38873,6 +39123,7 @@
                   <a:srgbClr val="1B3B6F"/>
                 </a:solidFill>
                 <a:latin typeface="Amiri" pitchFamily="2" charset="-78"/>
+                <a:ea typeface="Amiri" pitchFamily="2" charset="-78"/>
                 <a:cs typeface="Amiri" pitchFamily="2" charset="-78"/>
               </a:rPr>
               <a:t>عَادَاتٌ</a:t>
@@ -38976,6 +39227,7 @@
                   <a:srgbClr val="1B3B6F"/>
                 </a:solidFill>
                 <a:latin typeface="Amiri" pitchFamily="2" charset="-78"/>
+                <a:ea typeface="Amiri" pitchFamily="2" charset="-78"/>
                 <a:cs typeface="Amiri" pitchFamily="2" charset="-78"/>
               </a:rPr>
               <a:t>عَادَةٌ</a:t>
@@ -39241,6 +39493,7 @@
                   <a:srgbClr val="1B3B6F"/>
                 </a:solidFill>
                 <a:latin typeface="Amiri" pitchFamily="2" charset="-78"/>
+                <a:ea typeface="Amiri" pitchFamily="2" charset="-78"/>
                 <a:cs typeface="Amiri" pitchFamily="2" charset="-78"/>
               </a:rPr>
               <a:t>وَجْبَةٌ سَرِيعَةٌ</a:t>
@@ -39398,6 +39651,7 @@
                   <a:srgbClr val="1B3B6F"/>
                 </a:solidFill>
                 <a:latin typeface="Amiri" pitchFamily="2" charset="-78"/>
+                <a:ea typeface="Amiri" pitchFamily="2" charset="-78"/>
                 <a:cs typeface="Amiri" pitchFamily="2" charset="-78"/>
               </a:rPr>
               <a:t>وَجَبَاتٌ سَرِيعَةٌ</a:t>
@@ -39501,6 +39755,7 @@
                   <a:srgbClr val="1B3B6F"/>
                 </a:solidFill>
                 <a:latin typeface="Amiri" pitchFamily="2" charset="-78"/>
+                <a:ea typeface="Amiri" pitchFamily="2" charset="-78"/>
                 <a:cs typeface="Amiri" pitchFamily="2" charset="-78"/>
               </a:rPr>
               <a:t>وَجْبَةٌ سَرِيعَةٌ</a:t>
@@ -39634,6 +39889,7 @@
                   <a:srgbClr val="D4AF37"/>
                 </a:solidFill>
                 <a:latin typeface="Amiri" pitchFamily="2" charset="-78"/>
+                <a:ea typeface="Amiri" pitchFamily="2" charset="-78"/>
                 <a:cs typeface="Amiri" pitchFamily="2" charset="-78"/>
               </a:rPr>
               <a:t>م</a:t>
@@ -39954,6 +40210,7 @@
                   <a:srgbClr val="8A6D1E"/>
                 </a:solidFill>
                 <a:latin typeface="Amiri" pitchFamily="2" charset="-78"/>
+                <a:ea typeface="Amiri" pitchFamily="2" charset="-78"/>
                 <a:cs typeface="Amiri" pitchFamily="2" charset="-78"/>
               </a:rPr>
               <a:t>فِي الغُرَفِ</a:t>
@@ -41130,6 +41387,7 @@
                   <a:srgbClr val="1B3B6F"/>
                 </a:solidFill>
                 <a:latin typeface="Amiri" pitchFamily="2" charset="-78"/>
+                <a:ea typeface="Amiri" pitchFamily="2" charset="-78"/>
                 <a:cs typeface="Amiri" pitchFamily="2" charset="-78"/>
               </a:rPr>
               <a:t>دَوْرُكَ!</a:t>
@@ -41206,6 +41464,7 @@
                   <a:srgbClr val="1B3B6F"/>
                 </a:solidFill>
                 <a:latin typeface="Amiri" pitchFamily="2" charset="-78"/>
+                <a:ea typeface="Amiri" pitchFamily="2" charset="-78"/>
                 <a:cs typeface="Amiri" pitchFamily="2" charset="-78"/>
               </a:rPr>
               <a:t>أَحْسَنْتَ! / أَحْسَنْتِ!</a:t>
@@ -41282,6 +41541,7 @@
                   <a:srgbClr val="1B3B6F"/>
                 </a:solidFill>
                 <a:latin typeface="Amiri" pitchFamily="2" charset="-78"/>
+                <a:ea typeface="Amiri" pitchFamily="2" charset="-78"/>
                 <a:cs typeface="Amiri" pitchFamily="2" charset="-78"/>
               </a:rPr>
               <a:t>تَكَلَّمْ أَكْثَرَ، مِنْ فَضْلِكَ</a:t>
@@ -41358,6 +41618,7 @@
                   <a:srgbClr val="1B3B6F"/>
                 </a:solidFill>
                 <a:latin typeface="Amiri" pitchFamily="2" charset="-78"/>
+                <a:ea typeface="Amiri" pitchFamily="2" charset="-78"/>
                 <a:cs typeface="Amiri" pitchFamily="2" charset="-78"/>
               </a:rPr>
               <a:t>لِمَاذَا؟</a:t>
@@ -41529,6 +41790,7 @@
                   <a:srgbClr val="D4AF37"/>
                 </a:solidFill>
                 <a:latin typeface="Amiri" pitchFamily="2" charset="-78"/>
+                <a:ea typeface="Amiri" pitchFamily="2" charset="-78"/>
                 <a:cs typeface="Amiri" pitchFamily="2" charset="-78"/>
               </a:rPr>
               <a:t>م</a:t>
@@ -41849,6 +42111,7 @@
                   <a:srgbClr val="8A6D1E"/>
                 </a:solidFill>
                 <a:latin typeface="Amiri" pitchFamily="2" charset="-78"/>
+                <a:ea typeface="Amiri" pitchFamily="2" charset="-78"/>
                 <a:cs typeface="Amiri" pitchFamily="2" charset="-78"/>
               </a:rPr>
               <a:t>عِنْدَ مُمَرِّضَةِ المَدْرَسَةِ</a:t>
@@ -42129,6 +42392,7 @@
                   <a:srgbClr val="1B3B6F"/>
                 </a:solidFill>
                 <a:latin typeface="Amiri" pitchFamily="2" charset="-78"/>
+                <a:ea typeface="Amiri" pitchFamily="2" charset="-78"/>
                 <a:cs typeface="Amiri" pitchFamily="2" charset="-78"/>
               </a:rPr>
               <a:t>أَنَامُ … سَاعَاتٍ</a:t>
@@ -42205,6 +42469,7 @@
                   <a:srgbClr val="1B3B6F"/>
                 </a:solidFill>
                 <a:latin typeface="Amiri" pitchFamily="2" charset="-78"/>
+                <a:ea typeface="Amiri" pitchFamily="2" charset="-78"/>
                 <a:cs typeface="Amiri" pitchFamily="2" charset="-78"/>
               </a:rPr>
               <a:t>كَمْ سَاعَةً تَنَامُ فِي اللَّيْلِ؟</a:t>
@@ -42373,6 +42638,7 @@
                   <a:srgbClr val="1B3B6F"/>
                 </a:solidFill>
                 <a:latin typeface="Amiri" pitchFamily="2" charset="-78"/>
+                <a:ea typeface="Amiri" pitchFamily="2" charset="-78"/>
                 <a:cs typeface="Amiri" pitchFamily="2" charset="-78"/>
               </a:rPr>
               <a:t>آكُلُ … وَأَشْرَبُ …</a:t>
@@ -42449,6 +42715,7 @@
                   <a:srgbClr val="1B3B6F"/>
                 </a:solidFill>
                 <a:latin typeface="Amiri" pitchFamily="2" charset="-78"/>
+                <a:ea typeface="Amiri" pitchFamily="2" charset="-78"/>
                 <a:cs typeface="Amiri" pitchFamily="2" charset="-78"/>
               </a:rPr>
               <a:t>مَاذَا تَأْكُلُ فِي الفُطُورِ؟</a:t>
@@ -42617,6 +42884,7 @@
                   <a:srgbClr val="1B3B6F"/>
                 </a:solidFill>
                 <a:latin typeface="Amiri" pitchFamily="2" charset="-78"/>
+                <a:ea typeface="Amiri" pitchFamily="2" charset="-78"/>
                 <a:cs typeface="Amiri" pitchFamily="2" charset="-78"/>
               </a:rPr>
               <a:t>نَعَمْ، أُمَارِسُ … مَرَّتَيْنِ …</a:t>
@@ -42693,6 +42961,7 @@
                   <a:srgbClr val="1B3B6F"/>
                 </a:solidFill>
                 <a:latin typeface="Amiri" pitchFamily="2" charset="-78"/>
+                <a:ea typeface="Amiri" pitchFamily="2" charset="-78"/>
                 <a:cs typeface="Amiri" pitchFamily="2" charset="-78"/>
               </a:rPr>
               <a:t>هَلْ تُمَارِسُ الرِّيَاضَةَ؟</a:t>
@@ -42861,6 +43130,7 @@
                   <a:srgbClr val="1B3B6F"/>
                 </a:solidFill>
                 <a:latin typeface="Amiri" pitchFamily="2" charset="-78"/>
+                <a:ea typeface="Amiri" pitchFamily="2" charset="-78"/>
                 <a:cs typeface="Amiri" pitchFamily="2" charset="-78"/>
               </a:rPr>
               <a:t>أَشْرَبُ … أَكْوَابٍ</a:t>
@@ -42937,6 +43207,7 @@
                   <a:srgbClr val="1B3B6F"/>
                 </a:solidFill>
                 <a:latin typeface="Amiri" pitchFamily="2" charset="-78"/>
+                <a:ea typeface="Amiri" pitchFamily="2" charset="-78"/>
                 <a:cs typeface="Amiri" pitchFamily="2" charset="-78"/>
               </a:rPr>
               <a:t>كَمْ كُوبًا مِنَ المَاءِ تَشْرَبُ؟</a:t>
@@ -43105,6 +43376,7 @@
                   <a:srgbClr val="1B3B6F"/>
                 </a:solidFill>
                 <a:latin typeface="Amiri" pitchFamily="2" charset="-78"/>
+                <a:ea typeface="Amiri" pitchFamily="2" charset="-78"/>
                 <a:cs typeface="Amiri" pitchFamily="2" charset="-78"/>
               </a:rPr>
               <a:t>لَا، آكُلُهَا أَحْيَانًا فَقَطْ …</a:t>
@@ -43181,6 +43453,7 @@
                   <a:srgbClr val="1B3B6F"/>
                 </a:solidFill>
                 <a:latin typeface="Amiri" pitchFamily="2" charset="-78"/>
+                <a:ea typeface="Amiri" pitchFamily="2" charset="-78"/>
                 <a:cs typeface="Amiri" pitchFamily="2" charset="-78"/>
               </a:rPr>
               <a:t>هَلْ تَأْكُلُ الحَلَوِيَّاتِ كَثِيرًا؟</a:t>
@@ -43455,6 +43728,7 @@
                   <a:srgbClr val="D4AF37"/>
                 </a:solidFill>
                 <a:latin typeface="Amiri" pitchFamily="2" charset="-78"/>
+                <a:ea typeface="Amiri" pitchFamily="2" charset="-78"/>
                 <a:cs typeface="Amiri" pitchFamily="2" charset="-78"/>
               </a:rPr>
               <a:t>م</a:t>
@@ -43775,6 +44049,7 @@
                   <a:srgbClr val="8A6D1E"/>
                 </a:solidFill>
                 <a:latin typeface="Amiri" pitchFamily="2" charset="-78"/>
+                <a:ea typeface="Amiri" pitchFamily="2" charset="-78"/>
                 <a:cs typeface="Amiri" pitchFamily="2" charset="-78"/>
               </a:rPr>
               <a:t>فِي النَّادِي الرِّيَاضِيِّ</a:t>
@@ -44055,6 +44330,7 @@
                   <a:srgbClr val="1B3B6F"/>
                 </a:solidFill>
                 <a:latin typeface="Amiri" pitchFamily="2" charset="-78"/>
+                <a:ea typeface="Amiri" pitchFamily="2" charset="-78"/>
                 <a:cs typeface="Amiri" pitchFamily="2" charset="-78"/>
               </a:rPr>
               <a:t>أُرِيدُ أَنْ أَكُونَ …</a:t>
@@ -44131,6 +44407,7 @@
                   <a:srgbClr val="1B3B6F"/>
                 </a:solidFill>
                 <a:latin typeface="Amiri" pitchFamily="2" charset="-78"/>
+                <a:ea typeface="Amiri" pitchFamily="2" charset="-78"/>
                 <a:cs typeface="Amiri" pitchFamily="2" charset="-78"/>
               </a:rPr>
               <a:t>لِمَاذَا تُرِيدُ أَنْ تَشْتَرِكَ؟</a:t>
@@ -44299,6 +44576,7 @@
                   <a:srgbClr val="1B3B6F"/>
                 </a:solidFill>
                 <a:latin typeface="Amiri" pitchFamily="2" charset="-78"/>
+                <a:ea typeface="Amiri" pitchFamily="2" charset="-78"/>
                 <a:cs typeface="Amiri" pitchFamily="2" charset="-78"/>
               </a:rPr>
               <a:t>أُحِبُّ … لِأَنَّهَا …</a:t>
@@ -44375,6 +44653,7 @@
                   <a:srgbClr val="1B3B6F"/>
                 </a:solidFill>
                 <a:latin typeface="Amiri" pitchFamily="2" charset="-78"/>
+                <a:ea typeface="Amiri" pitchFamily="2" charset="-78"/>
                 <a:cs typeface="Amiri" pitchFamily="2" charset="-78"/>
               </a:rPr>
               <a:t>أَيَّ رِيَاضَةٍ تُحِبُّ؟</a:t>
@@ -44543,6 +44822,7 @@
                   <a:srgbClr val="1B3B6F"/>
                 </a:solidFill>
                 <a:latin typeface="Amiri" pitchFamily="2" charset="-78"/>
+                <a:ea typeface="Amiri" pitchFamily="2" charset="-78"/>
                 <a:cs typeface="Amiri" pitchFamily="2" charset="-78"/>
               </a:rPr>
               <a:t>أَسْتَطِيعُ أَنْ آتِيَ يَوْمَ …</a:t>
@@ -44619,6 +44899,7 @@
                   <a:srgbClr val="1B3B6F"/>
                 </a:solidFill>
                 <a:latin typeface="Amiri" pitchFamily="2" charset="-78"/>
+                <a:ea typeface="Amiri" pitchFamily="2" charset="-78"/>
                 <a:cs typeface="Amiri" pitchFamily="2" charset="-78"/>
               </a:rPr>
               <a:t>مَتَى تَسْتَطِيعُ أَنْ تَأْتِيَ؟</a:t>
@@ -44722,6 +45003,7 @@
                   <a:srgbClr val="1B3B6F"/>
                 </a:solidFill>
                 <a:latin typeface="Amiri" pitchFamily="2" charset="-78"/>
+                <a:ea typeface="Amiri" pitchFamily="2" charset="-78"/>
                 <a:cs typeface="Amiri" pitchFamily="2" charset="-78"/>
               </a:rPr>
               <a:t>مَاذَا يَنْبَغِي أَنْ …؟</a:t>
@@ -44798,6 +45080,7 @@
                   <a:srgbClr val="1B3B6F"/>
                 </a:solidFill>
                 <a:latin typeface="Amiri" pitchFamily="2" charset="-78"/>
+                <a:ea typeface="Amiri" pitchFamily="2" charset="-78"/>
                 <a:cs typeface="Amiri" pitchFamily="2" charset="-78"/>
               </a:rPr>
               <a:t>… يَجِبُ أَنْ تَأْكُلَ قَبْلَ التَّدْرِيبِ بِسَاعَتَيْنِ.</a:t>
@@ -44901,6 +45184,7 @@
                   <a:srgbClr val="1B3B6F"/>
                 </a:solidFill>
                 <a:latin typeface="Amiri" pitchFamily="2" charset="-78"/>
+                <a:ea typeface="Amiri" pitchFamily="2" charset="-78"/>
                 <a:cs typeface="Amiri" pitchFamily="2" charset="-78"/>
               </a:rPr>
               <a:t>لَا، … / نَعَمْ، عِنْدِي …</a:t>
@@ -44977,6 +45261,7 @@
                   <a:srgbClr val="1B3B6F"/>
                 </a:solidFill>
                 <a:latin typeface="Amiri" pitchFamily="2" charset="-78"/>
+                <a:ea typeface="Amiri" pitchFamily="2" charset="-78"/>
                 <a:cs typeface="Amiri" pitchFamily="2" charset="-78"/>
               </a:rPr>
               <a:t>هَلْ عِنْدَكَ أَيُّ مُشْكِلَةٍ صِحِّيَّةٍ؟</a:t>
@@ -45151,13 +45436,9 @@
     <a:fontScheme name="Office">
       <a:majorFont>
         <a:latin typeface="Calibri Light" panose="020F0302020204030204"/>
-        <a:ea typeface=""/>
-        <a:cs typeface=""/>
-        <a:font script="Jpan" typeface="游ゴシック Light"/>
-        <a:font script="Hang" typeface="맑은 고딕"/>
-        <a:font script="Hans" typeface="等线 Light"/>
-        <a:font script="Hant" typeface="新細明體"/>
-        <a:font script="Arab" typeface="Times New Roman"/>
+        <a:ea typeface="Amiri" pitchFamily="2" charset="-78"/>
+        <a:cs typeface="Amiri" pitchFamily="2" charset="-78"/>
+        <a:font script="Arab" typeface="Amiri"/>
         <a:font script="Hebr" typeface="Times New Roman"/>
         <a:font script="Thai" typeface="Angsana New"/>
         <a:font script="Ethi" typeface="Nyala"/>
@@ -45203,13 +45484,9 @@
       </a:majorFont>
       <a:minorFont>
         <a:latin typeface="Calibri" panose="020F0502020204030204"/>
-        <a:ea typeface=""/>
-        <a:cs typeface=""/>
-        <a:font script="Jpan" typeface="游ゴシック"/>
-        <a:font script="Hang" typeface="맑은 고딕"/>
-        <a:font script="Hans" typeface="等线"/>
-        <a:font script="Hant" typeface="新細明體"/>
-        <a:font script="Arab" typeface="Arial"/>
+        <a:ea typeface="Amiri" pitchFamily="2" charset="-78"/>
+        <a:cs typeface="Amiri" pitchFamily="2" charset="-78"/>
+        <a:font script="Arab" typeface="Amiri"/>
         <a:font script="Hebr" typeface="Arial"/>
         <a:font script="Thai" typeface="Cordia New"/>
         <a:font script="Ethi" typeface="Nyala"/>
